--- a/統合版_MC2027スタイル_ロードマップ×機能獲得_IR改訂版.pptx
+++ b/統合版_MC2027スタイル_ロードマップ×機能獲得_IR改訂版.pptx
@@ -5,6 +5,8 @@
     <p:sldMasterId id="2147483648" r:id="rId1"/>
   </p:sldMasterIdLst>
   <p:sldIdLst>
+    <p:sldId id="257" r:id="rId8"/>
+    <p:sldId id="258" r:id="rId9"/>
     <p:sldId id="256" r:id="rId2"/>
   </p:sldIdLst>
   <p:notesMasterIdLst>
@@ -6519,6 +6521,2246 @@
               <a:t>各フェーズで機能を段階的に積み上げ、開発力・運用力・運営力の三軸確立により、持続的な都市開発事業の実現を目指す</a:t>
             </a:r>
             <a:endParaRPr lang="en-US" sz="750" dirty="0"/>
+          </a:p>
+        </p:txBody>
+      </p:sp>
+    </p:spTree>
+  </p:cSld>
+  <p:clrMapOvr>
+    <a:masterClrMapping/>
+  </p:clrMapOvr>
+</p:sld>
+</file>
+
+<file path=ppt/slides/slide2.xml><?xml version="1.0" encoding="utf-8"?>
+<p:sld xmlns:a="http://schemas.openxmlformats.org/drawingml/2006/main" xmlns:p="http://schemas.openxmlformats.org/presentationml/2006/main" xmlns:r="http://schemas.openxmlformats.org/officeDocument/2006/relationships">
+  <p:cSld>
+    <p:spTree>
+      <p:nvGrpSpPr>
+        <p:cNvPr id="1" name=""/>
+        <p:cNvGrpSpPr/>
+        <p:nvPr/>
+      </p:nvGrpSpPr>
+      <p:grpSpPr/>
+      <p:sp>
+        <p:nvSpPr>
+          <p:cNvPr id="2" name="Rectangle 1"/>
+          <p:cNvSpPr/>
+          <p:nvPr/>
+        </p:nvSpPr>
+        <p:spPr>
+          <a:xfrm>
+            <a:off x="0" y="502920"/>
+            <a:ext cx="9144000" cy="4640580"/>
+          </a:xfrm>
+          <a:prstGeom prst="rect">
+            <a:avLst/>
+          </a:prstGeom>
+          <a:solidFill>
+            <a:srgbClr val="F5F7FA"/>
+          </a:solidFill>
+          <a:ln>
+            <a:noFill/>
+          </a:ln>
+          <a:effectLst/>
+        </p:spPr>
+        <p:style>
+          <a:lnRef idx="1">
+            <a:schemeClr val="accent1"/>
+          </a:lnRef>
+          <a:fillRef idx="3">
+            <a:schemeClr val="accent1"/>
+          </a:fillRef>
+          <a:effectRef idx="2">
+            <a:schemeClr val="accent1"/>
+          </a:effectRef>
+          <a:fontRef idx="minor">
+            <a:schemeClr val="lt1"/>
+          </a:fontRef>
+        </p:style>
+        <p:txBody>
+          <a:bodyPr rtlCol="0" anchor="ctr"/>
+          <a:lstStyle/>
+          <a:p>
+            <a:pPr algn="ctr"/>
+          </a:p>
+        </p:txBody>
+      </p:sp>
+      <p:sp>
+        <p:nvSpPr>
+          <p:cNvPr id="3" name="Rectangle 2"/>
+          <p:cNvSpPr/>
+          <p:nvPr/>
+        </p:nvSpPr>
+        <p:spPr>
+          <a:xfrm>
+            <a:off x="0" y="0"/>
+            <a:ext cx="9144000" cy="502920"/>
+          </a:xfrm>
+          <a:prstGeom prst="rect">
+            <a:avLst/>
+          </a:prstGeom>
+          <a:solidFill>
+            <a:srgbClr val="0B2E5B"/>
+          </a:solidFill>
+          <a:ln>
+            <a:noFill/>
+          </a:ln>
+          <a:effectLst/>
+        </p:spPr>
+        <p:style>
+          <a:lnRef idx="1">
+            <a:schemeClr val="accent1"/>
+          </a:lnRef>
+          <a:fillRef idx="3">
+            <a:schemeClr val="accent1"/>
+          </a:fillRef>
+          <a:effectRef idx="2">
+            <a:schemeClr val="accent1"/>
+          </a:effectRef>
+          <a:fontRef idx="minor">
+            <a:schemeClr val="lt1"/>
+          </a:fontRef>
+        </p:style>
+        <p:txBody>
+          <a:bodyPr rtlCol="0" anchor="ctr"/>
+          <a:lstStyle/>
+          <a:p>
+            <a:pPr algn="ctr"/>
+          </a:p>
+        </p:txBody>
+      </p:sp>
+      <p:sp>
+        <p:nvSpPr>
+          <p:cNvPr id="4" name="TextBox 3"/>
+          <p:cNvSpPr txBox="1"/>
+          <p:nvPr/>
+        </p:nvSpPr>
+        <p:spPr>
+          <a:xfrm>
+            <a:off x="274320" y="45720"/>
+            <a:ext cx="6858000" cy="411480"/>
+          </a:xfrm>
+          <a:prstGeom prst="rect">
+            <a:avLst/>
+          </a:prstGeom>
+          <a:noFill/>
+        </p:spPr>
+        <p:txBody>
+          <a:bodyPr wrap="square" lIns="73152" rIns="73152" tIns="36576" bIns="36576" anchor="ctr">
+            <a:spAutoFit/>
+          </a:bodyPr>
+          <a:lstStyle/>
+          <a:p>
+            <a:pPr algn="l"/>
+            <a:r>
+              <a:rPr sz="1800" b="1">
+                <a:solidFill>
+                  <a:srgbClr val="FFFFFF"/>
+                </a:solidFill>
+                <a:latin typeface="游ゴシック"/>
+              </a:rPr>
+              <a:t>エグゼクティブサマリ</a:t>
+            </a:r>
+          </a:p>
+        </p:txBody>
+      </p:sp>
+      <p:sp>
+        <p:nvSpPr>
+          <p:cNvPr id="5" name="TextBox 4"/>
+          <p:cNvSpPr txBox="1"/>
+          <p:nvPr/>
+        </p:nvSpPr>
+        <p:spPr>
+          <a:xfrm>
+            <a:off x="6858000" y="45720"/>
+            <a:ext cx="2194560" cy="411480"/>
+          </a:xfrm>
+          <a:prstGeom prst="rect">
+            <a:avLst/>
+          </a:prstGeom>
+          <a:noFill/>
+        </p:spPr>
+        <p:txBody>
+          <a:bodyPr wrap="square" lIns="73152" rIns="73152" tIns="36576" bIns="36576" anchor="ctr">
+            <a:spAutoFit/>
+          </a:bodyPr>
+          <a:lstStyle/>
+          <a:p>
+            <a:pPr algn="r"/>
+            <a:r>
+              <a:rPr sz="800" b="0">
+                <a:solidFill>
+                  <a:srgbClr val="FFFFFF"/>
+                </a:solidFill>
+                <a:latin typeface="游ゴシック"/>
+              </a:rPr>
+              <a:t>事業戦略（将来に関する記述を含みます）</a:t>
+            </a:r>
+          </a:p>
+        </p:txBody>
+      </p:sp>
+      <p:sp>
+        <p:nvSpPr>
+          <p:cNvPr id="6" name="TextBox 5"/>
+          <p:cNvSpPr txBox="1"/>
+          <p:nvPr/>
+        </p:nvSpPr>
+        <p:spPr>
+          <a:xfrm>
+            <a:off x="274320" y="548640"/>
+            <a:ext cx="8595360" cy="320040"/>
+          </a:xfrm>
+          <a:prstGeom prst="rect">
+            <a:avLst/>
+          </a:prstGeom>
+          <a:noFill/>
+        </p:spPr>
+        <p:txBody>
+          <a:bodyPr wrap="square" lIns="73152" rIns="73152" tIns="36576" bIns="36576" anchor="t">
+            <a:spAutoFit/>
+          </a:bodyPr>
+          <a:lstStyle/>
+          <a:p>
+            <a:pPr algn="l"/>
+            <a:r>
+              <a:rPr sz="1000" b="0">
+                <a:solidFill>
+                  <a:srgbClr val="666A73"/>
+                </a:solidFill>
+                <a:latin typeface="游ゴシック"/>
+              </a:rPr>
+              <a:t>都市開発事業の確立に向けた 目的・手段・課題</a:t>
+            </a:r>
+          </a:p>
+        </p:txBody>
+      </p:sp>
+      <p:sp>
+        <p:nvSpPr>
+          <p:cNvPr id="7" name="Rectangle 6"/>
+          <p:cNvSpPr/>
+          <p:nvPr/>
+        </p:nvSpPr>
+        <p:spPr>
+          <a:xfrm>
+            <a:off x="228600" y="960120"/>
+            <a:ext cx="2743200" cy="502920"/>
+          </a:xfrm>
+          <a:prstGeom prst="rect">
+            <a:avLst/>
+          </a:prstGeom>
+          <a:solidFill>
+            <a:srgbClr val="0B2E5B"/>
+          </a:solidFill>
+          <a:ln>
+            <a:noFill/>
+          </a:ln>
+          <a:effectLst/>
+        </p:spPr>
+        <p:style>
+          <a:lnRef idx="1">
+            <a:schemeClr val="accent1"/>
+          </a:lnRef>
+          <a:fillRef idx="3">
+            <a:schemeClr val="accent1"/>
+          </a:fillRef>
+          <a:effectRef idx="2">
+            <a:schemeClr val="accent1"/>
+          </a:effectRef>
+          <a:fontRef idx="minor">
+            <a:schemeClr val="lt1"/>
+          </a:fontRef>
+        </p:style>
+        <p:txBody>
+          <a:bodyPr rtlCol="0" anchor="ctr"/>
+          <a:lstStyle/>
+          <a:p>
+            <a:pPr algn="ctr"/>
+          </a:p>
+        </p:txBody>
+      </p:sp>
+      <p:sp>
+        <p:nvSpPr>
+          <p:cNvPr id="8" name="TextBox 7"/>
+          <p:cNvSpPr txBox="1"/>
+          <p:nvPr/>
+        </p:nvSpPr>
+        <p:spPr>
+          <a:xfrm>
+            <a:off x="320040" y="960120"/>
+            <a:ext cx="2560320" cy="502920"/>
+          </a:xfrm>
+          <a:prstGeom prst="rect">
+            <a:avLst/>
+          </a:prstGeom>
+          <a:noFill/>
+        </p:spPr>
+        <p:txBody>
+          <a:bodyPr wrap="square" lIns="73152" rIns="73152" tIns="36576" bIns="36576" anchor="ctr">
+            <a:spAutoFit/>
+          </a:bodyPr>
+          <a:lstStyle/>
+          <a:p>
+            <a:pPr algn="l"/>
+            <a:r>
+              <a:rPr sz="1400" b="1">
+                <a:solidFill>
+                  <a:srgbClr val="FFFFFF"/>
+                </a:solidFill>
+                <a:latin typeface="游ゴシック"/>
+              </a:rPr>
+              <a:t>目的 (Purpose)</a:t>
+            </a:r>
+          </a:p>
+        </p:txBody>
+      </p:sp>
+      <p:sp>
+        <p:nvSpPr>
+          <p:cNvPr id="9" name="Rectangle 8"/>
+          <p:cNvSpPr/>
+          <p:nvPr/>
+        </p:nvSpPr>
+        <p:spPr>
+          <a:xfrm>
+            <a:off x="228600" y="1463040"/>
+            <a:ext cx="2743200" cy="3520440"/>
+          </a:xfrm>
+          <a:prstGeom prst="rect">
+            <a:avLst/>
+          </a:prstGeom>
+          <a:solidFill>
+            <a:srgbClr val="FFFFFF"/>
+          </a:solidFill>
+          <a:ln w="9525">
+            <a:solidFill>
+              <a:srgbClr val="E5E7EB"/>
+            </a:solidFill>
+          </a:ln>
+          <a:effectLst/>
+        </p:spPr>
+        <p:style>
+          <a:lnRef idx="1">
+            <a:schemeClr val="accent1"/>
+          </a:lnRef>
+          <a:fillRef idx="3">
+            <a:schemeClr val="accent1"/>
+          </a:fillRef>
+          <a:effectRef idx="2">
+            <a:schemeClr val="accent1"/>
+          </a:effectRef>
+          <a:fontRef idx="minor">
+            <a:schemeClr val="lt1"/>
+          </a:fontRef>
+        </p:style>
+        <p:txBody>
+          <a:bodyPr rtlCol="0" anchor="ctr"/>
+          <a:lstStyle/>
+          <a:p>
+            <a:pPr algn="ctr"/>
+          </a:p>
+        </p:txBody>
+      </p:sp>
+      <p:sp>
+        <p:nvSpPr>
+          <p:cNvPr id="10" name="TextBox 9"/>
+          <p:cNvSpPr txBox="1"/>
+          <p:nvPr/>
+        </p:nvSpPr>
+        <p:spPr>
+          <a:xfrm>
+            <a:off x="365760" y="1554480"/>
+            <a:ext cx="2468880" cy="274320"/>
+          </a:xfrm>
+          <a:prstGeom prst="rect">
+            <a:avLst/>
+          </a:prstGeom>
+          <a:noFill/>
+        </p:spPr>
+        <p:txBody>
+          <a:bodyPr wrap="square" anchor="t">
+            <a:spAutoFit/>
+          </a:bodyPr>
+          <a:lstStyle/>
+          <a:p>
+            <a:pPr algn="l"/>
+            <a:r>
+              <a:rPr sz="900" b="1">
+                <a:solidFill>
+                  <a:srgbClr val="0B2E5B"/>
+                </a:solidFill>
+                <a:latin typeface="游ゴシック"/>
+              </a:rPr>
+              <a:t>何を実現するか</a:t>
+            </a:r>
+          </a:p>
+        </p:txBody>
+      </p:sp>
+      <p:sp>
+        <p:nvSpPr>
+          <p:cNvPr id="11" name="TextBox 10"/>
+          <p:cNvSpPr txBox="1"/>
+          <p:nvPr/>
+        </p:nvSpPr>
+        <p:spPr>
+          <a:xfrm>
+            <a:off x="365760" y="1828800"/>
+            <a:ext cx="2468880" cy="3017520"/>
+          </a:xfrm>
+          <a:prstGeom prst="rect">
+            <a:avLst/>
+          </a:prstGeom>
+          <a:noFill/>
+        </p:spPr>
+        <p:txBody>
+          <a:bodyPr wrap="square">
+            <a:spAutoFit/>
+          </a:bodyPr>
+          <a:lstStyle/>
+          <a:p>
+            <a:pPr algn="l"/>
+            <a:r>
+              <a:rPr sz="1000" b="1">
+                <a:solidFill>
+                  <a:srgbClr val="333333"/>
+                </a:solidFill>
+                <a:latin typeface="游ゴシック"/>
+              </a:rPr>
+              <a:t>■ 中核収益基盤の確立</a:t>
+            </a:r>
+          </a:p>
+          <a:p>
+            <a:pPr lvl="1">
+              <a:spcBef>
+                <a:spcPts val="100"/>
+              </a:spcBef>
+            </a:pPr>
+            <a:r>
+              <a:rPr sz="900">
+                <a:solidFill>
+                  <a:srgbClr val="666A73"/>
+                </a:solidFill>
+                <a:latin typeface="游ゴシック"/>
+              </a:rPr>
+              <a:t>  都市開発事業を三菱商事グループの中核収益基盤の一つへ</a:t>
+            </a:r>
+          </a:p>
+          <a:p>
+            <a:pPr algn="l">
+              <a:spcBef>
+                <a:spcPts val="600"/>
+              </a:spcBef>
+            </a:pPr>
+            <a:r>
+              <a:rPr sz="1000" b="1">
+                <a:solidFill>
+                  <a:srgbClr val="333333"/>
+                </a:solidFill>
+                <a:latin typeface="游ゴシック"/>
+              </a:rPr>
+              <a:t>■ 規模ある付加価値型開発</a:t>
+            </a:r>
+          </a:p>
+          <a:p>
+            <a:pPr lvl="1">
+              <a:spcBef>
+                <a:spcPts val="100"/>
+              </a:spcBef>
+            </a:pPr>
+            <a:r>
+              <a:rPr sz="900">
+                <a:solidFill>
+                  <a:srgbClr val="666A73"/>
+                </a:solidFill>
+                <a:latin typeface="游ゴシック"/>
+              </a:rPr>
+              <a:t>  多様なアセットクラスにわたる、付加価値の高い都市開発事業の展開</a:t>
+            </a:r>
+          </a:p>
+          <a:p>
+            <a:pPr algn="l">
+              <a:spcBef>
+                <a:spcPts val="600"/>
+              </a:spcBef>
+            </a:pPr>
+            <a:r>
+              <a:rPr sz="1000" b="1">
+                <a:solidFill>
+                  <a:srgbClr val="333333"/>
+                </a:solidFill>
+                <a:latin typeface="游ゴシック"/>
+              </a:rPr>
+              <a:t>■ 持続的な企業価値向上</a:t>
+            </a:r>
+          </a:p>
+          <a:p>
+            <a:pPr lvl="1">
+              <a:spcBef>
+                <a:spcPts val="100"/>
+              </a:spcBef>
+            </a:pPr>
+            <a:r>
+              <a:rPr sz="900">
+                <a:solidFill>
+                  <a:srgbClr val="666A73"/>
+                </a:solidFill>
+                <a:latin typeface="游ゴシック"/>
+              </a:rPr>
+              <a:t>  開発・運用・運営の三軸による持続的なキャッシュ・フロー創出と ROE 向上</a:t>
+            </a:r>
+          </a:p>
+        </p:txBody>
+      </p:sp>
+      <p:sp>
+        <p:nvSpPr>
+          <p:cNvPr id="12" name="Rectangle 11"/>
+          <p:cNvSpPr/>
+          <p:nvPr/>
+        </p:nvSpPr>
+        <p:spPr>
+          <a:xfrm>
+            <a:off x="3200400" y="960120"/>
+            <a:ext cx="2743200" cy="502920"/>
+          </a:xfrm>
+          <a:prstGeom prst="rect">
+            <a:avLst/>
+          </a:prstGeom>
+          <a:solidFill>
+            <a:srgbClr val="007A87"/>
+          </a:solidFill>
+          <a:ln>
+            <a:noFill/>
+          </a:ln>
+          <a:effectLst/>
+        </p:spPr>
+        <p:style>
+          <a:lnRef idx="1">
+            <a:schemeClr val="accent1"/>
+          </a:lnRef>
+          <a:fillRef idx="3">
+            <a:schemeClr val="accent1"/>
+          </a:fillRef>
+          <a:effectRef idx="2">
+            <a:schemeClr val="accent1"/>
+          </a:effectRef>
+          <a:fontRef idx="minor">
+            <a:schemeClr val="lt1"/>
+          </a:fontRef>
+        </p:style>
+        <p:txBody>
+          <a:bodyPr rtlCol="0" anchor="ctr"/>
+          <a:lstStyle/>
+          <a:p>
+            <a:pPr algn="ctr"/>
+          </a:p>
+        </p:txBody>
+      </p:sp>
+      <p:sp>
+        <p:nvSpPr>
+          <p:cNvPr id="13" name="TextBox 12"/>
+          <p:cNvSpPr txBox="1"/>
+          <p:nvPr/>
+        </p:nvSpPr>
+        <p:spPr>
+          <a:xfrm>
+            <a:off x="3291840" y="960120"/>
+            <a:ext cx="2560320" cy="502920"/>
+          </a:xfrm>
+          <a:prstGeom prst="rect">
+            <a:avLst/>
+          </a:prstGeom>
+          <a:noFill/>
+        </p:spPr>
+        <p:txBody>
+          <a:bodyPr wrap="square" lIns="73152" rIns="73152" tIns="36576" bIns="36576" anchor="ctr">
+            <a:spAutoFit/>
+          </a:bodyPr>
+          <a:lstStyle/>
+          <a:p>
+            <a:pPr algn="l"/>
+            <a:r>
+              <a:rPr sz="1400" b="1">
+                <a:solidFill>
+                  <a:srgbClr val="FFFFFF"/>
+                </a:solidFill>
+                <a:latin typeface="游ゴシック"/>
+              </a:rPr>
+              <a:t>手段 (Means)</a:t>
+            </a:r>
+          </a:p>
+        </p:txBody>
+      </p:sp>
+      <p:sp>
+        <p:nvSpPr>
+          <p:cNvPr id="14" name="Rectangle 13"/>
+          <p:cNvSpPr/>
+          <p:nvPr/>
+        </p:nvSpPr>
+        <p:spPr>
+          <a:xfrm>
+            <a:off x="3200400" y="1463040"/>
+            <a:ext cx="2743200" cy="3520440"/>
+          </a:xfrm>
+          <a:prstGeom prst="rect">
+            <a:avLst/>
+          </a:prstGeom>
+          <a:solidFill>
+            <a:srgbClr val="FFFFFF"/>
+          </a:solidFill>
+          <a:ln w="9525">
+            <a:solidFill>
+              <a:srgbClr val="E5E7EB"/>
+            </a:solidFill>
+          </a:ln>
+          <a:effectLst/>
+        </p:spPr>
+        <p:style>
+          <a:lnRef idx="1">
+            <a:schemeClr val="accent1"/>
+          </a:lnRef>
+          <a:fillRef idx="3">
+            <a:schemeClr val="accent1"/>
+          </a:fillRef>
+          <a:effectRef idx="2">
+            <a:schemeClr val="accent1"/>
+          </a:effectRef>
+          <a:fontRef idx="minor">
+            <a:schemeClr val="lt1"/>
+          </a:fontRef>
+        </p:style>
+        <p:txBody>
+          <a:bodyPr rtlCol="0" anchor="ctr"/>
+          <a:lstStyle/>
+          <a:p>
+            <a:pPr algn="ctr"/>
+          </a:p>
+        </p:txBody>
+      </p:sp>
+      <p:sp>
+        <p:nvSpPr>
+          <p:cNvPr id="15" name="TextBox 14"/>
+          <p:cNvSpPr txBox="1"/>
+          <p:nvPr/>
+        </p:nvSpPr>
+        <p:spPr>
+          <a:xfrm>
+            <a:off x="3337560" y="1554480"/>
+            <a:ext cx="2468880" cy="274320"/>
+          </a:xfrm>
+          <a:prstGeom prst="rect">
+            <a:avLst/>
+          </a:prstGeom>
+          <a:noFill/>
+        </p:spPr>
+        <p:txBody>
+          <a:bodyPr wrap="square" anchor="t">
+            <a:spAutoFit/>
+          </a:bodyPr>
+          <a:lstStyle/>
+          <a:p>
+            <a:pPr algn="l"/>
+            <a:r>
+              <a:rPr sz="900" b="1">
+                <a:solidFill>
+                  <a:srgbClr val="007A87"/>
+                </a:solidFill>
+                <a:latin typeface="游ゴシック"/>
+              </a:rPr>
+              <a:t>どう実現するか</a:t>
+            </a:r>
+          </a:p>
+        </p:txBody>
+      </p:sp>
+      <p:sp>
+        <p:nvSpPr>
+          <p:cNvPr id="16" name="TextBox 15"/>
+          <p:cNvSpPr txBox="1"/>
+          <p:nvPr/>
+        </p:nvSpPr>
+        <p:spPr>
+          <a:xfrm>
+            <a:off x="3337560" y="1828800"/>
+            <a:ext cx="2468880" cy="3017520"/>
+          </a:xfrm>
+          <a:prstGeom prst="rect">
+            <a:avLst/>
+          </a:prstGeom>
+          <a:noFill/>
+        </p:spPr>
+        <p:txBody>
+          <a:bodyPr wrap="square">
+            <a:spAutoFit/>
+          </a:bodyPr>
+          <a:lstStyle/>
+          <a:p>
+            <a:pPr algn="l"/>
+            <a:r>
+              <a:rPr sz="1000" b="1">
+                <a:solidFill>
+                  <a:srgbClr val="333333"/>
+                </a:solidFill>
+                <a:latin typeface="游ゴシック"/>
+              </a:rPr>
+              <a:t>■ 三軸の機能強化</a:t>
+            </a:r>
+          </a:p>
+          <a:p>
+            <a:pPr lvl="1">
+              <a:spcBef>
+                <a:spcPts val="100"/>
+              </a:spcBef>
+            </a:pPr>
+            <a:r>
+              <a:rPr sz="900">
+                <a:solidFill>
+                  <a:srgbClr val="666A73"/>
+                </a:solidFill>
+                <a:latin typeface="游ゴシック"/>
+              </a:rPr>
+              <a:t>  開発力・運用力・運営力の10機能を段階的に獲得</a:t>
+            </a:r>
+          </a:p>
+          <a:p>
+            <a:pPr algn="l">
+              <a:spcBef>
+                <a:spcPts val="600"/>
+              </a:spcBef>
+            </a:pPr>
+            <a:r>
+              <a:rPr sz="1000" b="1">
+                <a:solidFill>
+                  <a:srgbClr val="333333"/>
+                </a:solidFill>
+                <a:latin typeface="游ゴシック"/>
+              </a:rPr>
+              <a:t>■ 段階的な戦略投資</a:t>
+            </a:r>
+          </a:p>
+          <a:p>
+            <a:pPr lvl="1">
+              <a:spcBef>
+                <a:spcPts val="100"/>
+              </a:spcBef>
+            </a:pPr>
+            <a:r>
+              <a:rPr sz="900">
+                <a:solidFill>
+                  <a:srgbClr val="666A73"/>
+                </a:solidFill>
+                <a:latin typeface="游ゴシック"/>
+              </a:rPr>
+              <a:t>  戦略投資フェーズⅠ（基盤構築）→ Ⅱ（事業拡大）の2段階で投下</a:t>
+            </a:r>
+          </a:p>
+          <a:p>
+            <a:pPr algn="l">
+              <a:spcBef>
+                <a:spcPts val="600"/>
+              </a:spcBef>
+            </a:pPr>
+            <a:r>
+              <a:rPr sz="1000" b="1">
+                <a:solidFill>
+                  <a:srgbClr val="333333"/>
+                </a:solidFill>
+                <a:latin typeface="游ゴシック"/>
+              </a:rPr>
+              <a:t>■ 開発×運用の好循環モデル</a:t>
+            </a:r>
+          </a:p>
+          <a:p>
+            <a:pPr lvl="1">
+              <a:spcBef>
+                <a:spcPts val="100"/>
+              </a:spcBef>
+            </a:pPr>
+            <a:r>
+              <a:rPr sz="900">
+                <a:solidFill>
+                  <a:srgbClr val="666A73"/>
+                </a:solidFill>
+                <a:latin typeface="游ゴシック"/>
+              </a:rPr>
+              <a:t>  開発案件を運用プラットフォームへ組入れ、運用収益を次の開発に再投下</a:t>
+            </a:r>
+          </a:p>
+          <a:p>
+            <a:pPr algn="l">
+              <a:spcBef>
+                <a:spcPts val="600"/>
+              </a:spcBef>
+            </a:pPr>
+            <a:r>
+              <a:rPr sz="1000" b="1">
+                <a:solidFill>
+                  <a:srgbClr val="333333"/>
+                </a:solidFill>
+                <a:latin typeface="游ゴシック"/>
+              </a:rPr>
+              <a:t>■ 投資規律とリスク管理</a:t>
+            </a:r>
+          </a:p>
+          <a:p>
+            <a:pPr lvl="1">
+              <a:spcBef>
+                <a:spcPts val="100"/>
+              </a:spcBef>
+            </a:pPr>
+            <a:r>
+              <a:rPr sz="900">
+                <a:solidFill>
+                  <a:srgbClr val="666A73"/>
+                </a:solidFill>
+                <a:latin typeface="游ゴシック"/>
+              </a:rPr>
+              <a:t>  規模と資本効率を両立させる投資判断力の体系化</a:t>
+            </a:r>
+          </a:p>
+        </p:txBody>
+      </p:sp>
+      <p:sp>
+        <p:nvSpPr>
+          <p:cNvPr id="17" name="Rectangle 16"/>
+          <p:cNvSpPr/>
+          <p:nvPr/>
+        </p:nvSpPr>
+        <p:spPr>
+          <a:xfrm>
+            <a:off x="6172200" y="960120"/>
+            <a:ext cx="2743200" cy="502920"/>
+          </a:xfrm>
+          <a:prstGeom prst="rect">
+            <a:avLst/>
+          </a:prstGeom>
+          <a:solidFill>
+            <a:srgbClr val="B76E00"/>
+          </a:solidFill>
+          <a:ln>
+            <a:noFill/>
+          </a:ln>
+          <a:effectLst/>
+        </p:spPr>
+        <p:style>
+          <a:lnRef idx="1">
+            <a:schemeClr val="accent1"/>
+          </a:lnRef>
+          <a:fillRef idx="3">
+            <a:schemeClr val="accent1"/>
+          </a:fillRef>
+          <a:effectRef idx="2">
+            <a:schemeClr val="accent1"/>
+          </a:effectRef>
+          <a:fontRef idx="minor">
+            <a:schemeClr val="lt1"/>
+          </a:fontRef>
+        </p:style>
+        <p:txBody>
+          <a:bodyPr rtlCol="0" anchor="ctr"/>
+          <a:lstStyle/>
+          <a:p>
+            <a:pPr algn="ctr"/>
+          </a:p>
+        </p:txBody>
+      </p:sp>
+      <p:sp>
+        <p:nvSpPr>
+          <p:cNvPr id="18" name="TextBox 17"/>
+          <p:cNvSpPr txBox="1"/>
+          <p:nvPr/>
+        </p:nvSpPr>
+        <p:spPr>
+          <a:xfrm>
+            <a:off x="6263640" y="960120"/>
+            <a:ext cx="2560320" cy="502920"/>
+          </a:xfrm>
+          <a:prstGeom prst="rect">
+            <a:avLst/>
+          </a:prstGeom>
+          <a:noFill/>
+        </p:spPr>
+        <p:txBody>
+          <a:bodyPr wrap="square" lIns="73152" rIns="73152" tIns="36576" bIns="36576" anchor="ctr">
+            <a:spAutoFit/>
+          </a:bodyPr>
+          <a:lstStyle/>
+          <a:p>
+            <a:pPr algn="l"/>
+            <a:r>
+              <a:rPr sz="1400" b="1">
+                <a:solidFill>
+                  <a:srgbClr val="FFFFFF"/>
+                </a:solidFill>
+                <a:latin typeface="游ゴシック"/>
+              </a:rPr>
+              <a:t>課題 (Issues)</a:t>
+            </a:r>
+          </a:p>
+        </p:txBody>
+      </p:sp>
+      <p:sp>
+        <p:nvSpPr>
+          <p:cNvPr id="19" name="Rectangle 18"/>
+          <p:cNvSpPr/>
+          <p:nvPr/>
+        </p:nvSpPr>
+        <p:spPr>
+          <a:xfrm>
+            <a:off x="6172200" y="1463040"/>
+            <a:ext cx="2743200" cy="3520440"/>
+          </a:xfrm>
+          <a:prstGeom prst="rect">
+            <a:avLst/>
+          </a:prstGeom>
+          <a:solidFill>
+            <a:srgbClr val="FFFFFF"/>
+          </a:solidFill>
+          <a:ln w="9525">
+            <a:solidFill>
+              <a:srgbClr val="E5E7EB"/>
+            </a:solidFill>
+          </a:ln>
+          <a:effectLst/>
+        </p:spPr>
+        <p:style>
+          <a:lnRef idx="1">
+            <a:schemeClr val="accent1"/>
+          </a:lnRef>
+          <a:fillRef idx="3">
+            <a:schemeClr val="accent1"/>
+          </a:fillRef>
+          <a:effectRef idx="2">
+            <a:schemeClr val="accent1"/>
+          </a:effectRef>
+          <a:fontRef idx="minor">
+            <a:schemeClr val="lt1"/>
+          </a:fontRef>
+        </p:style>
+        <p:txBody>
+          <a:bodyPr rtlCol="0" anchor="ctr"/>
+          <a:lstStyle/>
+          <a:p>
+            <a:pPr algn="ctr"/>
+          </a:p>
+        </p:txBody>
+      </p:sp>
+      <p:sp>
+        <p:nvSpPr>
+          <p:cNvPr id="20" name="TextBox 19"/>
+          <p:cNvSpPr txBox="1"/>
+          <p:nvPr/>
+        </p:nvSpPr>
+        <p:spPr>
+          <a:xfrm>
+            <a:off x="6309360" y="1554480"/>
+            <a:ext cx="2468880" cy="274320"/>
+          </a:xfrm>
+          <a:prstGeom prst="rect">
+            <a:avLst/>
+          </a:prstGeom>
+          <a:noFill/>
+        </p:spPr>
+        <p:txBody>
+          <a:bodyPr wrap="square" anchor="t">
+            <a:spAutoFit/>
+          </a:bodyPr>
+          <a:lstStyle/>
+          <a:p>
+            <a:pPr algn="l"/>
+            <a:r>
+              <a:rPr sz="900" b="1">
+                <a:solidFill>
+                  <a:srgbClr val="B76E00"/>
+                </a:solidFill>
+                <a:latin typeface="游ゴシック"/>
+              </a:rPr>
+              <a:t>何がボトルネックか</a:t>
+            </a:r>
+          </a:p>
+        </p:txBody>
+      </p:sp>
+      <p:sp>
+        <p:nvSpPr>
+          <p:cNvPr id="21" name="TextBox 20"/>
+          <p:cNvSpPr txBox="1"/>
+          <p:nvPr/>
+        </p:nvSpPr>
+        <p:spPr>
+          <a:xfrm>
+            <a:off x="6309360" y="1828800"/>
+            <a:ext cx="2468880" cy="3017520"/>
+          </a:xfrm>
+          <a:prstGeom prst="rect">
+            <a:avLst/>
+          </a:prstGeom>
+          <a:noFill/>
+        </p:spPr>
+        <p:txBody>
+          <a:bodyPr wrap="square">
+            <a:spAutoFit/>
+          </a:bodyPr>
+          <a:lstStyle/>
+          <a:p>
+            <a:pPr algn="l"/>
+            <a:r>
+              <a:rPr sz="1000" b="1">
+                <a:solidFill>
+                  <a:srgbClr val="333333"/>
+                </a:solidFill>
+                <a:latin typeface="游ゴシック"/>
+              </a:rPr>
+              <a:t>■ バリューアップ型開発機能の未確立</a:t>
+            </a:r>
+          </a:p>
+          <a:p>
+            <a:pPr lvl="1">
+              <a:spcBef>
+                <a:spcPts val="100"/>
+              </a:spcBef>
+            </a:pPr>
+            <a:r>
+              <a:rPr sz="900">
+                <a:solidFill>
+                  <a:srgbClr val="666A73"/>
+                </a:solidFill>
+                <a:latin typeface="游ゴシック"/>
+              </a:rPr>
+              <a:t>  現状は幅広いアセットライン対応のみ。付加価値創出の設計力が不足</a:t>
+            </a:r>
+          </a:p>
+          <a:p>
+            <a:pPr algn="l">
+              <a:spcBef>
+                <a:spcPts val="600"/>
+              </a:spcBef>
+            </a:pPr>
+            <a:r>
+              <a:rPr sz="1000" b="1">
+                <a:solidFill>
+                  <a:srgbClr val="333333"/>
+                </a:solidFill>
+                <a:latin typeface="游ゴシック"/>
+              </a:rPr>
+              <a:t>■ 開発〜Exit収益サイクル未確立</a:t>
+            </a:r>
+          </a:p>
+          <a:p>
+            <a:pPr lvl="1">
+              <a:spcBef>
+                <a:spcPts val="100"/>
+              </a:spcBef>
+            </a:pPr>
+            <a:r>
+              <a:rPr sz="900">
+                <a:solidFill>
+                  <a:srgbClr val="666A73"/>
+                </a:solidFill>
+                <a:latin typeface="游ゴシック"/>
+              </a:rPr>
+              <a:t>  開発資産をExitし収益計上する出口戦略が未整備</a:t>
+            </a:r>
+          </a:p>
+          <a:p>
+            <a:pPr algn="l">
+              <a:spcBef>
+                <a:spcPts val="600"/>
+              </a:spcBef>
+            </a:pPr>
+            <a:r>
+              <a:rPr sz="1000" b="1">
+                <a:solidFill>
+                  <a:srgbClr val="333333"/>
+                </a:solidFill>
+                <a:latin typeface="游ゴシック"/>
+              </a:rPr>
+              <a:t>■ AUM拡大・投資判断力の体系化未着手</a:t>
+            </a:r>
+          </a:p>
+          <a:p>
+            <a:pPr lvl="1">
+              <a:spcBef>
+                <a:spcPts val="100"/>
+              </a:spcBef>
+            </a:pPr>
+            <a:r>
+              <a:rPr sz="900">
+                <a:solidFill>
+                  <a:srgbClr val="666A73"/>
+                </a:solidFill>
+                <a:latin typeface="游ゴシック"/>
+              </a:rPr>
+              <a:t>  ファンド組成・投資家基盤と連動した投資目利き・アンダーライティングの仕組み化</a:t>
+            </a:r>
+          </a:p>
+          <a:p>
+            <a:pPr algn="l">
+              <a:spcBef>
+                <a:spcPts val="600"/>
+              </a:spcBef>
+            </a:pPr>
+            <a:r>
+              <a:rPr sz="1000" b="1">
+                <a:solidFill>
+                  <a:srgbClr val="333333"/>
+                </a:solidFill>
+                <a:latin typeface="游ゴシック"/>
+              </a:rPr>
+              <a:t>■ 都市運営プラットフォームの不在</a:t>
+            </a:r>
+          </a:p>
+          <a:p>
+            <a:pPr lvl="1">
+              <a:spcBef>
+                <a:spcPts val="100"/>
+              </a:spcBef>
+            </a:pPr>
+            <a:r>
+              <a:rPr sz="900">
+                <a:solidFill>
+                  <a:srgbClr val="666A73"/>
+                </a:solidFill>
+                <a:latin typeface="游ゴシック"/>
+              </a:rPr>
+              <a:t>  NOI拡大・バリューアップを継続的に回す運営主体が未確立</a:t>
+            </a:r>
+          </a:p>
+        </p:txBody>
+      </p:sp>
+      <p:sp>
+        <p:nvSpPr>
+          <p:cNvPr id="22" name="TextBox 21"/>
+          <p:cNvSpPr txBox="1"/>
+          <p:nvPr/>
+        </p:nvSpPr>
+        <p:spPr>
+          <a:xfrm>
+            <a:off x="274320" y="4846320"/>
+            <a:ext cx="8595360" cy="274320"/>
+          </a:xfrm>
+          <a:prstGeom prst="rect">
+            <a:avLst/>
+          </a:prstGeom>
+          <a:noFill/>
+        </p:spPr>
+        <p:txBody>
+          <a:bodyPr wrap="square" lIns="73152" rIns="73152" tIns="36576" bIns="36576" anchor="t">
+            <a:spAutoFit/>
+          </a:bodyPr>
+          <a:lstStyle/>
+          <a:p>
+            <a:pPr algn="l"/>
+            <a:r>
+              <a:rPr sz="800" b="0">
+                <a:solidFill>
+                  <a:srgbClr val="666A73"/>
+                </a:solidFill>
+                <a:latin typeface="游ゴシック"/>
+              </a:rPr>
+              <a:t>※ 本ページの記述には将来見通しに関する情報を含み、実際の結果と異なる可能性があります。</a:t>
+            </a:r>
+          </a:p>
+        </p:txBody>
+      </p:sp>
+    </p:spTree>
+  </p:cSld>
+  <p:clrMapOvr>
+    <a:masterClrMapping/>
+  </p:clrMapOvr>
+</p:sld>
+</file>
+
+<file path=ppt/slides/slide3.xml><?xml version="1.0" encoding="utf-8"?>
+<p:sld xmlns:a="http://schemas.openxmlformats.org/drawingml/2006/main" xmlns:p="http://schemas.openxmlformats.org/presentationml/2006/main" xmlns:r="http://schemas.openxmlformats.org/officeDocument/2006/relationships">
+  <p:cSld>
+    <p:spTree>
+      <p:nvGrpSpPr>
+        <p:cNvPr id="1" name=""/>
+        <p:cNvGrpSpPr/>
+        <p:nvPr/>
+      </p:nvGrpSpPr>
+      <p:grpSpPr/>
+      <p:sp>
+        <p:nvSpPr>
+          <p:cNvPr id="2" name="Rectangle 1"/>
+          <p:cNvSpPr/>
+          <p:nvPr/>
+        </p:nvSpPr>
+        <p:spPr>
+          <a:xfrm>
+            <a:off x="0" y="502920"/>
+            <a:ext cx="9144000" cy="4640580"/>
+          </a:xfrm>
+          <a:prstGeom prst="rect">
+            <a:avLst/>
+          </a:prstGeom>
+          <a:solidFill>
+            <a:srgbClr val="F5F7FA"/>
+          </a:solidFill>
+          <a:ln>
+            <a:noFill/>
+          </a:ln>
+          <a:effectLst/>
+        </p:spPr>
+        <p:style>
+          <a:lnRef idx="1">
+            <a:schemeClr val="accent1"/>
+          </a:lnRef>
+          <a:fillRef idx="3">
+            <a:schemeClr val="accent1"/>
+          </a:fillRef>
+          <a:effectRef idx="2">
+            <a:schemeClr val="accent1"/>
+          </a:effectRef>
+          <a:fontRef idx="minor">
+            <a:schemeClr val="lt1"/>
+          </a:fontRef>
+        </p:style>
+        <p:txBody>
+          <a:bodyPr rtlCol="0" anchor="ctr"/>
+          <a:lstStyle/>
+          <a:p>
+            <a:pPr algn="ctr"/>
+          </a:p>
+        </p:txBody>
+      </p:sp>
+      <p:sp>
+        <p:nvSpPr>
+          <p:cNvPr id="3" name="Rectangle 2"/>
+          <p:cNvSpPr/>
+          <p:nvPr/>
+        </p:nvSpPr>
+        <p:spPr>
+          <a:xfrm>
+            <a:off x="0" y="0"/>
+            <a:ext cx="9144000" cy="502920"/>
+          </a:xfrm>
+          <a:prstGeom prst="rect">
+            <a:avLst/>
+          </a:prstGeom>
+          <a:solidFill>
+            <a:srgbClr val="0B2E5B"/>
+          </a:solidFill>
+          <a:ln>
+            <a:noFill/>
+          </a:ln>
+          <a:effectLst/>
+        </p:spPr>
+        <p:style>
+          <a:lnRef idx="1">
+            <a:schemeClr val="accent1"/>
+          </a:lnRef>
+          <a:fillRef idx="3">
+            <a:schemeClr val="accent1"/>
+          </a:fillRef>
+          <a:effectRef idx="2">
+            <a:schemeClr val="accent1"/>
+          </a:effectRef>
+          <a:fontRef idx="minor">
+            <a:schemeClr val="lt1"/>
+          </a:fontRef>
+        </p:style>
+        <p:txBody>
+          <a:bodyPr rtlCol="0" anchor="ctr"/>
+          <a:lstStyle/>
+          <a:p>
+            <a:pPr algn="ctr"/>
+          </a:p>
+        </p:txBody>
+      </p:sp>
+      <p:sp>
+        <p:nvSpPr>
+          <p:cNvPr id="4" name="TextBox 3"/>
+          <p:cNvSpPr txBox="1"/>
+          <p:nvPr/>
+        </p:nvSpPr>
+        <p:spPr>
+          <a:xfrm>
+            <a:off x="274320" y="45720"/>
+            <a:ext cx="6858000" cy="411480"/>
+          </a:xfrm>
+          <a:prstGeom prst="rect">
+            <a:avLst/>
+          </a:prstGeom>
+          <a:noFill/>
+        </p:spPr>
+        <p:txBody>
+          <a:bodyPr wrap="square" lIns="73152" rIns="73152" tIns="36576" bIns="36576" anchor="ctr">
+            <a:spAutoFit/>
+          </a:bodyPr>
+          <a:lstStyle/>
+          <a:p>
+            <a:pPr algn="l"/>
+            <a:r>
+              <a:rPr sz="1800" b="1">
+                <a:solidFill>
+                  <a:srgbClr val="FFFFFF"/>
+                </a:solidFill>
+                <a:latin typeface="游ゴシック"/>
+              </a:rPr>
+              <a:t>開発事業 × 運用事業の好循環モデル</a:t>
+            </a:r>
+          </a:p>
+        </p:txBody>
+      </p:sp>
+      <p:sp>
+        <p:nvSpPr>
+          <p:cNvPr id="5" name="TextBox 4"/>
+          <p:cNvSpPr txBox="1"/>
+          <p:nvPr/>
+        </p:nvSpPr>
+        <p:spPr>
+          <a:xfrm>
+            <a:off x="6858000" y="45720"/>
+            <a:ext cx="2194560" cy="411480"/>
+          </a:xfrm>
+          <a:prstGeom prst="rect">
+            <a:avLst/>
+          </a:prstGeom>
+          <a:noFill/>
+        </p:spPr>
+        <p:txBody>
+          <a:bodyPr wrap="square" lIns="73152" rIns="73152" tIns="36576" bIns="36576" anchor="ctr">
+            <a:spAutoFit/>
+          </a:bodyPr>
+          <a:lstStyle/>
+          <a:p>
+            <a:pPr algn="r"/>
+            <a:r>
+              <a:rPr sz="800" b="0">
+                <a:solidFill>
+                  <a:srgbClr val="FFFFFF"/>
+                </a:solidFill>
+                <a:latin typeface="游ゴシック"/>
+              </a:rPr>
+              <a:t>事業戦略（将来に関する記述を含みます）</a:t>
+            </a:r>
+          </a:p>
+        </p:txBody>
+      </p:sp>
+      <p:sp>
+        <p:nvSpPr>
+          <p:cNvPr id="6" name="TextBox 5"/>
+          <p:cNvSpPr txBox="1"/>
+          <p:nvPr/>
+        </p:nvSpPr>
+        <p:spPr>
+          <a:xfrm>
+            <a:off x="274320" y="548640"/>
+            <a:ext cx="8595360" cy="320040"/>
+          </a:xfrm>
+          <a:prstGeom prst="rect">
+            <a:avLst/>
+          </a:prstGeom>
+          <a:noFill/>
+        </p:spPr>
+        <p:txBody>
+          <a:bodyPr wrap="square" lIns="73152" rIns="73152" tIns="36576" bIns="36576" anchor="t">
+            <a:spAutoFit/>
+          </a:bodyPr>
+          <a:lstStyle/>
+          <a:p>
+            <a:pPr algn="l"/>
+            <a:r>
+              <a:rPr sz="1000" b="0">
+                <a:solidFill>
+                  <a:srgbClr val="666A73"/>
+                </a:solidFill>
+                <a:latin typeface="游ゴシック"/>
+              </a:rPr>
+              <a:t>三軸の機能が相互に強化し合う仕組みを構築</a:t>
+            </a:r>
+          </a:p>
+        </p:txBody>
+      </p:sp>
+      <p:sp>
+        <p:nvSpPr>
+          <p:cNvPr id="7" name="Rectangle 6"/>
+          <p:cNvSpPr/>
+          <p:nvPr/>
+        </p:nvSpPr>
+        <p:spPr>
+          <a:xfrm>
+            <a:off x="457200" y="960120"/>
+            <a:ext cx="3017520" cy="2011680"/>
+          </a:xfrm>
+          <a:prstGeom prst="rect">
+            <a:avLst/>
+          </a:prstGeom>
+          <a:solidFill>
+            <a:srgbClr val="0B2E5B"/>
+          </a:solidFill>
+          <a:ln>
+            <a:noFill/>
+          </a:ln>
+          <a:effectLst/>
+        </p:spPr>
+        <p:style>
+          <a:lnRef idx="1">
+            <a:schemeClr val="accent1"/>
+          </a:lnRef>
+          <a:fillRef idx="3">
+            <a:schemeClr val="accent1"/>
+          </a:fillRef>
+          <a:effectRef idx="2">
+            <a:schemeClr val="accent1"/>
+          </a:effectRef>
+          <a:fontRef idx="minor">
+            <a:schemeClr val="lt1"/>
+          </a:fontRef>
+        </p:style>
+        <p:txBody>
+          <a:bodyPr rtlCol="0" anchor="ctr"/>
+          <a:lstStyle/>
+          <a:p>
+            <a:pPr algn="ctr"/>
+          </a:p>
+        </p:txBody>
+      </p:sp>
+      <p:sp>
+        <p:nvSpPr>
+          <p:cNvPr id="8" name="TextBox 7"/>
+          <p:cNvSpPr txBox="1"/>
+          <p:nvPr/>
+        </p:nvSpPr>
+        <p:spPr>
+          <a:xfrm>
+            <a:off x="457200" y="1033272"/>
+            <a:ext cx="3017520" cy="347472"/>
+          </a:xfrm>
+          <a:prstGeom prst="rect">
+            <a:avLst/>
+          </a:prstGeom>
+          <a:noFill/>
+        </p:spPr>
+        <p:txBody>
+          <a:bodyPr wrap="square" lIns="73152" rIns="73152" tIns="36576" bIns="36576" anchor="ctr">
+            <a:spAutoFit/>
+          </a:bodyPr>
+          <a:lstStyle/>
+          <a:p>
+            <a:pPr algn="ctr"/>
+            <a:r>
+              <a:rPr sz="1500" b="1">
+                <a:solidFill>
+                  <a:srgbClr val="FFFFFF"/>
+                </a:solidFill>
+                <a:latin typeface="游ゴシック"/>
+              </a:rPr>
+              <a:t>開発事業</a:t>
+            </a:r>
+          </a:p>
+        </p:txBody>
+      </p:sp>
+      <p:sp>
+        <p:nvSpPr>
+          <p:cNvPr id="9" name="TextBox 8"/>
+          <p:cNvSpPr txBox="1"/>
+          <p:nvPr/>
+        </p:nvSpPr>
+        <p:spPr>
+          <a:xfrm>
+            <a:off x="594360" y="1463040"/>
+            <a:ext cx="2743200" cy="1463040"/>
+          </a:xfrm>
+          <a:prstGeom prst="rect">
+            <a:avLst/>
+          </a:prstGeom>
+          <a:noFill/>
+        </p:spPr>
+        <p:txBody>
+          <a:bodyPr wrap="square">
+            <a:spAutoFit/>
+          </a:bodyPr>
+          <a:lstStyle/>
+          <a:p>
+            <a:pPr>
+              <a:spcBef>
+                <a:spcPts val="400"/>
+              </a:spcBef>
+            </a:pPr>
+            <a:r>
+              <a:rPr sz="1000">
+                <a:solidFill>
+                  <a:srgbClr val="FFFFFF"/>
+                </a:solidFill>
+                <a:latin typeface="游ゴシック"/>
+              </a:rPr>
+              <a:t>・ 多様なアセットクラスへの対応力</a:t>
+            </a:r>
+          </a:p>
+          <a:p>
+            <a:pPr>
+              <a:spcBef>
+                <a:spcPts val="400"/>
+              </a:spcBef>
+            </a:pPr>
+            <a:r>
+              <a:rPr sz="1000">
+                <a:solidFill>
+                  <a:srgbClr val="FFFFFF"/>
+                </a:solidFill>
+                <a:latin typeface="游ゴシック"/>
+              </a:rPr>
+              <a:t>・ 産業・商業複合型 企画・ソーシング力</a:t>
+            </a:r>
+          </a:p>
+          <a:p>
+            <a:pPr>
+              <a:spcBef>
+                <a:spcPts val="400"/>
+              </a:spcBef>
+            </a:pPr>
+            <a:r>
+              <a:rPr sz="1000">
+                <a:solidFill>
+                  <a:srgbClr val="FFFFFF"/>
+                </a:solidFill>
+                <a:latin typeface="游ゴシック"/>
+              </a:rPr>
+              <a:t>・ バリューアップ型開発機能</a:t>
+            </a:r>
+          </a:p>
+          <a:p>
+            <a:pPr>
+              <a:spcBef>
+                <a:spcPts val="400"/>
+              </a:spcBef>
+            </a:pPr>
+            <a:r>
+              <a:rPr sz="1000">
+                <a:solidFill>
+                  <a:srgbClr val="FFFFFF"/>
+                </a:solidFill>
+                <a:latin typeface="游ゴシック"/>
+              </a:rPr>
+              <a:t>・ 開発〜Exit の収益サイクル確立</a:t>
+            </a:r>
+          </a:p>
+        </p:txBody>
+      </p:sp>
+      <p:sp>
+        <p:nvSpPr>
+          <p:cNvPr id="10" name="Rectangle 9"/>
+          <p:cNvSpPr/>
+          <p:nvPr/>
+        </p:nvSpPr>
+        <p:spPr>
+          <a:xfrm>
+            <a:off x="5669280" y="960120"/>
+            <a:ext cx="3017520" cy="2011680"/>
+          </a:xfrm>
+          <a:prstGeom prst="rect">
+            <a:avLst/>
+          </a:prstGeom>
+          <a:solidFill>
+            <a:srgbClr val="007A87"/>
+          </a:solidFill>
+          <a:ln>
+            <a:noFill/>
+          </a:ln>
+          <a:effectLst/>
+        </p:spPr>
+        <p:style>
+          <a:lnRef idx="1">
+            <a:schemeClr val="accent1"/>
+          </a:lnRef>
+          <a:fillRef idx="3">
+            <a:schemeClr val="accent1"/>
+          </a:fillRef>
+          <a:effectRef idx="2">
+            <a:schemeClr val="accent1"/>
+          </a:effectRef>
+          <a:fontRef idx="minor">
+            <a:schemeClr val="lt1"/>
+          </a:fontRef>
+        </p:style>
+        <p:txBody>
+          <a:bodyPr rtlCol="0" anchor="ctr"/>
+          <a:lstStyle/>
+          <a:p>
+            <a:pPr algn="ctr"/>
+          </a:p>
+        </p:txBody>
+      </p:sp>
+      <p:sp>
+        <p:nvSpPr>
+          <p:cNvPr id="11" name="TextBox 10"/>
+          <p:cNvSpPr txBox="1"/>
+          <p:nvPr/>
+        </p:nvSpPr>
+        <p:spPr>
+          <a:xfrm>
+            <a:off x="5669280" y="1033272"/>
+            <a:ext cx="3017520" cy="347472"/>
+          </a:xfrm>
+          <a:prstGeom prst="rect">
+            <a:avLst/>
+          </a:prstGeom>
+          <a:noFill/>
+        </p:spPr>
+        <p:txBody>
+          <a:bodyPr wrap="square" lIns="73152" rIns="73152" tIns="36576" bIns="36576" anchor="ctr">
+            <a:spAutoFit/>
+          </a:bodyPr>
+          <a:lstStyle/>
+          <a:p>
+            <a:pPr algn="ctr"/>
+            <a:r>
+              <a:rPr sz="1500" b="1">
+                <a:solidFill>
+                  <a:srgbClr val="FFFFFF"/>
+                </a:solidFill>
+                <a:latin typeface="游ゴシック"/>
+              </a:rPr>
+              <a:t>運用事業（運用 × 運営）</a:t>
+            </a:r>
+          </a:p>
+        </p:txBody>
+      </p:sp>
+      <p:sp>
+        <p:nvSpPr>
+          <p:cNvPr id="12" name="TextBox 11"/>
+          <p:cNvSpPr txBox="1"/>
+          <p:nvPr/>
+        </p:nvSpPr>
+        <p:spPr>
+          <a:xfrm>
+            <a:off x="5806440" y="1463040"/>
+            <a:ext cx="2743200" cy="1463040"/>
+          </a:xfrm>
+          <a:prstGeom prst="rect">
+            <a:avLst/>
+          </a:prstGeom>
+          <a:noFill/>
+        </p:spPr>
+        <p:txBody>
+          <a:bodyPr wrap="square">
+            <a:spAutoFit/>
+          </a:bodyPr>
+          <a:lstStyle/>
+          <a:p>
+            <a:pPr>
+              <a:spcBef>
+                <a:spcPts val="400"/>
+              </a:spcBef>
+            </a:pPr>
+            <a:r>
+              <a:rPr sz="1000">
+                <a:solidFill>
+                  <a:srgbClr val="FFFFFF"/>
+                </a:solidFill>
+                <a:latin typeface="游ゴシック"/>
+              </a:rPr>
+              <a:t>・ 投資家基盤の拡充・パイプライン構築</a:t>
+            </a:r>
+          </a:p>
+          <a:p>
+            <a:pPr>
+              <a:spcBef>
+                <a:spcPts val="400"/>
+              </a:spcBef>
+            </a:pPr>
+            <a:r>
+              <a:rPr sz="1000">
+                <a:solidFill>
+                  <a:srgbClr val="FFFFFF"/>
+                </a:solidFill>
+                <a:latin typeface="游ゴシック"/>
+              </a:rPr>
+              <a:t>・ ファンド組成・アセットマネジメント体制</a:t>
+            </a:r>
+          </a:p>
+          <a:p>
+            <a:pPr>
+              <a:spcBef>
+                <a:spcPts val="400"/>
+              </a:spcBef>
+            </a:pPr>
+            <a:r>
+              <a:rPr sz="1000">
+                <a:solidFill>
+                  <a:srgbClr val="FFFFFF"/>
+                </a:solidFill>
+                <a:latin typeface="游ゴシック"/>
+              </a:rPr>
+              <a:t>・ AUM拡大・投資判断力の体系化</a:t>
+            </a:r>
+          </a:p>
+          <a:p>
+            <a:pPr>
+              <a:spcBef>
+                <a:spcPts val="400"/>
+              </a:spcBef>
+            </a:pPr>
+            <a:r>
+              <a:rPr sz="1000">
+                <a:solidFill>
+                  <a:srgbClr val="FFFFFF"/>
+                </a:solidFill>
+                <a:latin typeface="游ゴシック"/>
+              </a:rPr>
+              <a:t>・ NOI拡大・都市運営プラットフォーム</a:t>
+            </a:r>
+          </a:p>
+        </p:txBody>
+      </p:sp>
+      <p:sp>
+        <p:nvSpPr>
+          <p:cNvPr id="13" name="Right Arrow 12"/>
+          <p:cNvSpPr/>
+          <p:nvPr/>
+        </p:nvSpPr>
+        <p:spPr>
+          <a:xfrm>
+            <a:off x="3520439" y="1280160"/>
+            <a:ext cx="2103120" cy="502920"/>
+          </a:xfrm>
+          <a:prstGeom prst="rightArrow">
+            <a:avLst/>
+          </a:prstGeom>
+          <a:solidFill>
+            <a:srgbClr val="1F4E8F"/>
+          </a:solidFill>
+          <a:ln>
+            <a:noFill/>
+          </a:ln>
+        </p:spPr>
+        <p:style>
+          <a:lnRef idx="1">
+            <a:schemeClr val="accent1"/>
+          </a:lnRef>
+          <a:fillRef idx="3">
+            <a:schemeClr val="accent1"/>
+          </a:fillRef>
+          <a:effectRef idx="2">
+            <a:schemeClr val="accent1"/>
+          </a:effectRef>
+          <a:fontRef idx="minor">
+            <a:schemeClr val="lt1"/>
+          </a:fontRef>
+        </p:style>
+        <p:txBody>
+          <a:bodyPr rtlCol="0" anchor="ctr" wrap="square" lIns="182880" rIns="182880"/>
+          <a:lstStyle/>
+          <a:p>
+            <a:pPr algn="ctr"/>
+            <a:r>
+              <a:rPr sz="1100" b="1">
+                <a:solidFill>
+                  <a:srgbClr val="FFFFFF"/>
+                </a:solidFill>
+                <a:latin typeface="游ゴシック"/>
+              </a:rPr>
+              <a:t>良質アセット供給・開発Exit収益</a:t>
+            </a:r>
+          </a:p>
+        </p:txBody>
+      </p:sp>
+      <p:sp>
+        <p:nvSpPr>
+          <p:cNvPr id="14" name="Left Arrow 13"/>
+          <p:cNvSpPr/>
+          <p:nvPr/>
+        </p:nvSpPr>
+        <p:spPr>
+          <a:xfrm>
+            <a:off x="3520439" y="2148840"/>
+            <a:ext cx="2103120" cy="502920"/>
+          </a:xfrm>
+          <a:prstGeom prst="leftArrow">
+            <a:avLst/>
+          </a:prstGeom>
+          <a:solidFill>
+            <a:srgbClr val="007A87"/>
+          </a:solidFill>
+          <a:ln>
+            <a:noFill/>
+          </a:ln>
+        </p:spPr>
+        <p:style>
+          <a:lnRef idx="1">
+            <a:schemeClr val="accent1"/>
+          </a:lnRef>
+          <a:fillRef idx="3">
+            <a:schemeClr val="accent1"/>
+          </a:fillRef>
+          <a:effectRef idx="2">
+            <a:schemeClr val="accent1"/>
+          </a:effectRef>
+          <a:fontRef idx="minor">
+            <a:schemeClr val="lt1"/>
+          </a:fontRef>
+        </p:style>
+        <p:txBody>
+          <a:bodyPr rtlCol="0" anchor="ctr" wrap="square" lIns="182880" rIns="182880"/>
+          <a:lstStyle/>
+          <a:p>
+            <a:pPr algn="ctr"/>
+            <a:r>
+              <a:rPr sz="1100" b="1">
+                <a:solidFill>
+                  <a:srgbClr val="FFFFFF"/>
+                </a:solidFill>
+                <a:latin typeface="游ゴシック"/>
+              </a:rPr>
+              <a:t>資金調達力・運用収益・市場知見を還流</a:t>
+            </a:r>
+          </a:p>
+        </p:txBody>
+      </p:sp>
+      <p:sp>
+        <p:nvSpPr>
+          <p:cNvPr id="15" name="Rectangle 14"/>
+          <p:cNvSpPr/>
+          <p:nvPr/>
+        </p:nvSpPr>
+        <p:spPr>
+          <a:xfrm>
+            <a:off x="457200" y="3154680"/>
+            <a:ext cx="8229600" cy="1325880"/>
+          </a:xfrm>
+          <a:prstGeom prst="rect">
+            <a:avLst/>
+          </a:prstGeom>
+          <a:solidFill>
+            <a:srgbClr val="FFFFFF"/>
+          </a:solidFill>
+          <a:ln w="9525">
+            <a:solidFill>
+              <a:srgbClr val="E5E7EB"/>
+            </a:solidFill>
+          </a:ln>
+          <a:effectLst/>
+        </p:spPr>
+        <p:style>
+          <a:lnRef idx="1">
+            <a:schemeClr val="accent1"/>
+          </a:lnRef>
+          <a:fillRef idx="3">
+            <a:schemeClr val="accent1"/>
+          </a:fillRef>
+          <a:effectRef idx="2">
+            <a:schemeClr val="accent1"/>
+          </a:effectRef>
+          <a:fontRef idx="minor">
+            <a:schemeClr val="lt1"/>
+          </a:fontRef>
+        </p:style>
+        <p:txBody>
+          <a:bodyPr rtlCol="0" anchor="ctr"/>
+          <a:lstStyle/>
+          <a:p>
+            <a:pPr algn="ctr"/>
+          </a:p>
+        </p:txBody>
+      </p:sp>
+      <p:sp>
+        <p:nvSpPr>
+          <p:cNvPr id="16" name="TextBox 15"/>
+          <p:cNvSpPr txBox="1"/>
+          <p:nvPr/>
+        </p:nvSpPr>
+        <p:spPr>
+          <a:xfrm>
+            <a:off x="594360" y="3227832"/>
+            <a:ext cx="7955279" cy="292608"/>
+          </a:xfrm>
+          <a:prstGeom prst="rect">
+            <a:avLst/>
+          </a:prstGeom>
+          <a:noFill/>
+        </p:spPr>
+        <p:txBody>
+          <a:bodyPr wrap="square" lIns="73152" rIns="73152" tIns="36576" bIns="36576" anchor="t">
+            <a:spAutoFit/>
+          </a:bodyPr>
+          <a:lstStyle/>
+          <a:p>
+            <a:pPr algn="l"/>
+            <a:r>
+              <a:rPr sz="1200" b="1">
+                <a:solidFill>
+                  <a:srgbClr val="0B2E5B"/>
+                </a:solidFill>
+                <a:latin typeface="游ゴシック"/>
+              </a:rPr>
+              <a:t>好循環による成果（Outcome）</a:t>
+            </a:r>
+          </a:p>
+        </p:txBody>
+      </p:sp>
+      <p:sp>
+        <p:nvSpPr>
+          <p:cNvPr id="17" name="Rectangle 16"/>
+          <p:cNvSpPr/>
+          <p:nvPr/>
+        </p:nvSpPr>
+        <p:spPr>
+          <a:xfrm>
+            <a:off x="594360" y="3593592"/>
+            <a:ext cx="2560320" cy="749808"/>
+          </a:xfrm>
+          <a:prstGeom prst="rect">
+            <a:avLst/>
+          </a:prstGeom>
+          <a:solidFill>
+            <a:srgbClr val="0B2E5B"/>
+          </a:solidFill>
+          <a:ln>
+            <a:noFill/>
+          </a:ln>
+          <a:effectLst/>
+        </p:spPr>
+        <p:style>
+          <a:lnRef idx="1">
+            <a:schemeClr val="accent1"/>
+          </a:lnRef>
+          <a:fillRef idx="3">
+            <a:schemeClr val="accent1"/>
+          </a:fillRef>
+          <a:effectRef idx="2">
+            <a:schemeClr val="accent1"/>
+          </a:effectRef>
+          <a:fontRef idx="minor">
+            <a:schemeClr val="lt1"/>
+          </a:fontRef>
+        </p:style>
+        <p:txBody>
+          <a:bodyPr rtlCol="0" anchor="ctr"/>
+          <a:lstStyle/>
+          <a:p>
+            <a:pPr algn="ctr"/>
+          </a:p>
+        </p:txBody>
+      </p:sp>
+      <p:sp>
+        <p:nvSpPr>
+          <p:cNvPr id="18" name="TextBox 17"/>
+          <p:cNvSpPr txBox="1"/>
+          <p:nvPr/>
+        </p:nvSpPr>
+        <p:spPr>
+          <a:xfrm>
+            <a:off x="704088" y="3648456"/>
+            <a:ext cx="2340863" cy="292608"/>
+          </a:xfrm>
+          <a:prstGeom prst="rect">
+            <a:avLst/>
+          </a:prstGeom>
+          <a:noFill/>
+        </p:spPr>
+        <p:txBody>
+          <a:bodyPr wrap="square" lIns="73152" rIns="73152" tIns="36576" bIns="36576" anchor="t">
+            <a:spAutoFit/>
+          </a:bodyPr>
+          <a:lstStyle/>
+          <a:p>
+            <a:pPr algn="l"/>
+            <a:r>
+              <a:rPr sz="1100" b="1">
+                <a:solidFill>
+                  <a:srgbClr val="FFFFFF"/>
+                </a:solidFill>
+                <a:latin typeface="游ゴシック"/>
+              </a:rPr>
+              <a:t>キャッシュ・フロー拡大</a:t>
+            </a:r>
+          </a:p>
+        </p:txBody>
+      </p:sp>
+      <p:sp>
+        <p:nvSpPr>
+          <p:cNvPr id="19" name="TextBox 18"/>
+          <p:cNvSpPr txBox="1"/>
+          <p:nvPr/>
+        </p:nvSpPr>
+        <p:spPr>
+          <a:xfrm>
+            <a:off x="704088" y="3959352"/>
+            <a:ext cx="2340863" cy="347472"/>
+          </a:xfrm>
+          <a:prstGeom prst="rect">
+            <a:avLst/>
+          </a:prstGeom>
+          <a:noFill/>
+        </p:spPr>
+        <p:txBody>
+          <a:bodyPr wrap="square" lIns="73152" rIns="73152" tIns="36576" bIns="36576" anchor="t">
+            <a:spAutoFit/>
+          </a:bodyPr>
+          <a:lstStyle/>
+          <a:p>
+            <a:pPr algn="l"/>
+            <a:r>
+              <a:rPr sz="800" b="0">
+                <a:solidFill>
+                  <a:srgbClr val="FFFFFF"/>
+                </a:solidFill>
+                <a:latin typeface="游ゴシック"/>
+              </a:rPr>
+              <a:t>開発Exit益 ＋ 運用手数料・NOI の積上げ</a:t>
+            </a:r>
+          </a:p>
+        </p:txBody>
+      </p:sp>
+      <p:sp>
+        <p:nvSpPr>
+          <p:cNvPr id="20" name="Rectangle 19"/>
+          <p:cNvSpPr/>
+          <p:nvPr/>
+        </p:nvSpPr>
+        <p:spPr>
+          <a:xfrm>
+            <a:off x="3246120" y="3593592"/>
+            <a:ext cx="2560320" cy="749808"/>
+          </a:xfrm>
+          <a:prstGeom prst="rect">
+            <a:avLst/>
+          </a:prstGeom>
+          <a:solidFill>
+            <a:srgbClr val="1F4E8F"/>
+          </a:solidFill>
+          <a:ln>
+            <a:noFill/>
+          </a:ln>
+          <a:effectLst/>
+        </p:spPr>
+        <p:style>
+          <a:lnRef idx="1">
+            <a:schemeClr val="accent1"/>
+          </a:lnRef>
+          <a:fillRef idx="3">
+            <a:schemeClr val="accent1"/>
+          </a:fillRef>
+          <a:effectRef idx="2">
+            <a:schemeClr val="accent1"/>
+          </a:effectRef>
+          <a:fontRef idx="minor">
+            <a:schemeClr val="lt1"/>
+          </a:fontRef>
+        </p:style>
+        <p:txBody>
+          <a:bodyPr rtlCol="0" anchor="ctr"/>
+          <a:lstStyle/>
+          <a:p>
+            <a:pPr algn="ctr"/>
+          </a:p>
+        </p:txBody>
+      </p:sp>
+      <p:sp>
+        <p:nvSpPr>
+          <p:cNvPr id="21" name="TextBox 20"/>
+          <p:cNvSpPr txBox="1"/>
+          <p:nvPr/>
+        </p:nvSpPr>
+        <p:spPr>
+          <a:xfrm>
+            <a:off x="3355848" y="3648456"/>
+            <a:ext cx="2340863" cy="292608"/>
+          </a:xfrm>
+          <a:prstGeom prst="rect">
+            <a:avLst/>
+          </a:prstGeom>
+          <a:noFill/>
+        </p:spPr>
+        <p:txBody>
+          <a:bodyPr wrap="square" lIns="73152" rIns="73152" tIns="36576" bIns="36576" anchor="t">
+            <a:spAutoFit/>
+          </a:bodyPr>
+          <a:lstStyle/>
+          <a:p>
+            <a:pPr algn="l"/>
+            <a:r>
+              <a:rPr sz="1100" b="1">
+                <a:solidFill>
+                  <a:srgbClr val="FFFFFF"/>
+                </a:solidFill>
+                <a:latin typeface="游ゴシック"/>
+              </a:rPr>
+              <a:t>資本効率（ROE）の改善</a:t>
+            </a:r>
+          </a:p>
+        </p:txBody>
+      </p:sp>
+      <p:sp>
+        <p:nvSpPr>
+          <p:cNvPr id="22" name="TextBox 21"/>
+          <p:cNvSpPr txBox="1"/>
+          <p:nvPr/>
+        </p:nvSpPr>
+        <p:spPr>
+          <a:xfrm>
+            <a:off x="3355848" y="3959352"/>
+            <a:ext cx="2340863" cy="347472"/>
+          </a:xfrm>
+          <a:prstGeom prst="rect">
+            <a:avLst/>
+          </a:prstGeom>
+          <a:noFill/>
+        </p:spPr>
+        <p:txBody>
+          <a:bodyPr wrap="square" lIns="73152" rIns="73152" tIns="36576" bIns="36576" anchor="t">
+            <a:spAutoFit/>
+          </a:bodyPr>
+          <a:lstStyle/>
+          <a:p>
+            <a:pPr algn="l"/>
+            <a:r>
+              <a:rPr sz="800" b="0">
+                <a:solidFill>
+                  <a:srgbClr val="FFFFFF"/>
+                </a:solidFill>
+                <a:latin typeface="游ゴシック"/>
+              </a:rPr>
+              <a:t>アセット回転型モデルで自己資本の生産性向上</a:t>
+            </a:r>
+          </a:p>
+        </p:txBody>
+      </p:sp>
+      <p:sp>
+        <p:nvSpPr>
+          <p:cNvPr id="23" name="Rectangle 22"/>
+          <p:cNvSpPr/>
+          <p:nvPr/>
+        </p:nvSpPr>
+        <p:spPr>
+          <a:xfrm>
+            <a:off x="5897880" y="3593592"/>
+            <a:ext cx="2560320" cy="749808"/>
+          </a:xfrm>
+          <a:prstGeom prst="rect">
+            <a:avLst/>
+          </a:prstGeom>
+          <a:solidFill>
+            <a:srgbClr val="007A87"/>
+          </a:solidFill>
+          <a:ln>
+            <a:noFill/>
+          </a:ln>
+          <a:effectLst/>
+        </p:spPr>
+        <p:style>
+          <a:lnRef idx="1">
+            <a:schemeClr val="accent1"/>
+          </a:lnRef>
+          <a:fillRef idx="3">
+            <a:schemeClr val="accent1"/>
+          </a:fillRef>
+          <a:effectRef idx="2">
+            <a:schemeClr val="accent1"/>
+          </a:effectRef>
+          <a:fontRef idx="minor">
+            <a:schemeClr val="lt1"/>
+          </a:fontRef>
+        </p:style>
+        <p:txBody>
+          <a:bodyPr rtlCol="0" anchor="ctr"/>
+          <a:lstStyle/>
+          <a:p>
+            <a:pPr algn="ctr"/>
+          </a:p>
+        </p:txBody>
+      </p:sp>
+      <p:sp>
+        <p:nvSpPr>
+          <p:cNvPr id="24" name="TextBox 23"/>
+          <p:cNvSpPr txBox="1"/>
+          <p:nvPr/>
+        </p:nvSpPr>
+        <p:spPr>
+          <a:xfrm>
+            <a:off x="6007608" y="3648456"/>
+            <a:ext cx="2340863" cy="292608"/>
+          </a:xfrm>
+          <a:prstGeom prst="rect">
+            <a:avLst/>
+          </a:prstGeom>
+          <a:noFill/>
+        </p:spPr>
+        <p:txBody>
+          <a:bodyPr wrap="square" lIns="73152" rIns="73152" tIns="36576" bIns="36576" anchor="t">
+            <a:spAutoFit/>
+          </a:bodyPr>
+          <a:lstStyle/>
+          <a:p>
+            <a:pPr algn="l"/>
+            <a:r>
+              <a:rPr sz="1100" b="1">
+                <a:solidFill>
+                  <a:srgbClr val="FFFFFF"/>
+                </a:solidFill>
+                <a:latin typeface="游ゴシック"/>
+              </a:rPr>
+              <a:t>AUM の持続的成長</a:t>
+            </a:r>
+          </a:p>
+        </p:txBody>
+      </p:sp>
+      <p:sp>
+        <p:nvSpPr>
+          <p:cNvPr id="25" name="TextBox 24"/>
+          <p:cNvSpPr txBox="1"/>
+          <p:nvPr/>
+        </p:nvSpPr>
+        <p:spPr>
+          <a:xfrm>
+            <a:off x="6007608" y="3959352"/>
+            <a:ext cx="2340863" cy="347472"/>
+          </a:xfrm>
+          <a:prstGeom prst="rect">
+            <a:avLst/>
+          </a:prstGeom>
+          <a:noFill/>
+        </p:spPr>
+        <p:txBody>
+          <a:bodyPr wrap="square" lIns="73152" rIns="73152" tIns="36576" bIns="36576" anchor="t">
+            <a:spAutoFit/>
+          </a:bodyPr>
+          <a:lstStyle/>
+          <a:p>
+            <a:pPr algn="l"/>
+            <a:r>
+              <a:rPr sz="800" b="0">
+                <a:solidFill>
+                  <a:srgbClr val="FFFFFF"/>
+                </a:solidFill>
+                <a:latin typeface="游ゴシック"/>
+              </a:rPr>
+              <a:t>投資家基盤拡大×開発パイプライン継続供給</a:t>
+            </a:r>
+          </a:p>
+        </p:txBody>
+      </p:sp>
+      <p:sp>
+        <p:nvSpPr>
+          <p:cNvPr id="26" name="TextBox 25"/>
+          <p:cNvSpPr txBox="1"/>
+          <p:nvPr/>
+        </p:nvSpPr>
+        <p:spPr>
+          <a:xfrm>
+            <a:off x="274320" y="4846320"/>
+            <a:ext cx="8595360" cy="274320"/>
+          </a:xfrm>
+          <a:prstGeom prst="rect">
+            <a:avLst/>
+          </a:prstGeom>
+          <a:noFill/>
+        </p:spPr>
+        <p:txBody>
+          <a:bodyPr wrap="square" lIns="73152" rIns="73152" tIns="36576" bIns="36576" anchor="t">
+            <a:spAutoFit/>
+          </a:bodyPr>
+          <a:lstStyle/>
+          <a:p>
+            <a:pPr algn="l"/>
+            <a:r>
+              <a:rPr sz="800" b="0">
+                <a:solidFill>
+                  <a:srgbClr val="666A73"/>
+                </a:solidFill>
+                <a:latin typeface="游ゴシック"/>
+              </a:rPr>
+              <a:t>※ 本モデルは事業構想上の循環図であり、具体的な数値目標・事業計画については別途開示します。</a:t>
+            </a:r>
           </a:p>
         </p:txBody>
       </p:sp>

--- a/統合版_MC2027スタイル_ロードマップ×機能獲得_IR改訂版.pptx
+++ b/統合版_MC2027スタイル_ロードマップ×機能獲得_IR改訂版.pptx
@@ -7795,7 +7795,7 @@
                 </a:solidFill>
                 <a:latin typeface="游ゴシック"/>
               </a:rPr>
-              <a:t>開発事業 × 運用事業の好循環モデル</a:t>
+              <a:t>機能獲得の段階的積み上げ（ロードマップ概観）</a:t>
             </a:r>
           </a:p>
         </p:txBody>
@@ -7865,7 +7865,7 @@
                 </a:solidFill>
                 <a:latin typeface="游ゴシック"/>
               </a:rPr>
-              <a:t>三軸の機能が相互に強化し合う仕組みを構築</a:t>
+              <a:t>現在 ⇒ 戦略投資フェーズⅠ ⇒ Ⅱ ⇒ 都市開発事業の確立 ― 階段状に機能を獲得</a:t>
             </a:r>
           </a:p>
         </p:txBody>
@@ -7878,17 +7878,19 @@
         </p:nvSpPr>
         <p:spPr>
           <a:xfrm>
-            <a:off x="457200" y="960120"/>
-            <a:ext cx="3017520" cy="2011680"/>
-          </a:xfrm>
-          <a:prstGeom prst="rect">
-            <a:avLst/>
-          </a:prstGeom>
-          <a:solidFill>
-            <a:srgbClr val="0B2E5B"/>
-          </a:solidFill>
-          <a:ln>
-            <a:noFill/>
+            <a:off x="6400800" y="868680"/>
+            <a:ext cx="2606040" cy="502920"/>
+          </a:xfrm>
+          <a:prstGeom prst="rect">
+            <a:avLst/>
+          </a:prstGeom>
+          <a:solidFill>
+            <a:srgbClr val="FFFFFF"/>
+          </a:solidFill>
+          <a:ln w="6350">
+            <a:solidFill>
+              <a:srgbClr val="E5E7EB"/>
+            </a:solidFill>
           </a:ln>
           <a:effectLst/>
         </p:spPr>
@@ -7922,136 +7924,49 @@
         </p:nvSpPr>
         <p:spPr>
           <a:xfrm>
-            <a:off x="457200" y="1033272"/>
-            <a:ext cx="3017520" cy="347472"/>
-          </a:xfrm>
-          <a:prstGeom prst="rect">
-            <a:avLst/>
-          </a:prstGeom>
-          <a:noFill/>
-        </p:spPr>
-        <p:txBody>
-          <a:bodyPr wrap="square" lIns="73152" rIns="73152" tIns="36576" bIns="36576" anchor="ctr">
+            <a:off x="6492240" y="905256"/>
+            <a:ext cx="2423160" cy="182880"/>
+          </a:xfrm>
+          <a:prstGeom prst="rect">
+            <a:avLst/>
+          </a:prstGeom>
+          <a:noFill/>
+        </p:spPr>
+        <p:txBody>
+          <a:bodyPr wrap="square" lIns="73152" rIns="73152" tIns="36576" bIns="36576" anchor="t">
             <a:spAutoFit/>
           </a:bodyPr>
           <a:lstStyle/>
           <a:p>
-            <a:pPr algn="ctr"/>
-            <a:r>
-              <a:rPr sz="1500" b="1">
-                <a:solidFill>
-                  <a:srgbClr val="FFFFFF"/>
+            <a:pPr algn="l"/>
+            <a:r>
+              <a:rPr sz="800" b="1">
+                <a:solidFill>
+                  <a:srgbClr val="333333"/>
                 </a:solidFill>
                 <a:latin typeface="游ゴシック"/>
               </a:rPr>
-              <a:t>開発事業</a:t>
-            </a:r>
-          </a:p>
-        </p:txBody>
-      </p:sp>
-      <p:sp>
-        <p:nvSpPr>
-          <p:cNvPr id="9" name="TextBox 8"/>
-          <p:cNvSpPr txBox="1"/>
-          <p:nvPr/>
-        </p:nvSpPr>
-        <p:spPr>
-          <a:xfrm>
-            <a:off x="594360" y="1463040"/>
-            <a:ext cx="2743200" cy="1463040"/>
-          </a:xfrm>
-          <a:prstGeom prst="rect">
-            <a:avLst/>
-          </a:prstGeom>
-          <a:noFill/>
-        </p:spPr>
-        <p:txBody>
-          <a:bodyPr wrap="square">
-            <a:spAutoFit/>
-          </a:bodyPr>
-          <a:lstStyle/>
-          <a:p>
-            <a:pPr>
-              <a:spcBef>
-                <a:spcPts val="400"/>
-              </a:spcBef>
-            </a:pPr>
-            <a:r>
-              <a:rPr sz="1000">
-                <a:solidFill>
-                  <a:srgbClr val="FFFFFF"/>
-                </a:solidFill>
-                <a:latin typeface="游ゴシック"/>
-              </a:rPr>
-              <a:t>・ 多様なアセットクラスへの対応力</a:t>
-            </a:r>
-          </a:p>
-          <a:p>
-            <a:pPr>
-              <a:spcBef>
-                <a:spcPts val="400"/>
-              </a:spcBef>
-            </a:pPr>
-            <a:r>
-              <a:rPr sz="1000">
-                <a:solidFill>
-                  <a:srgbClr val="FFFFFF"/>
-                </a:solidFill>
-                <a:latin typeface="游ゴシック"/>
-              </a:rPr>
-              <a:t>・ 産業・商業複合型 企画・ソーシング力</a:t>
-            </a:r>
-          </a:p>
-          <a:p>
-            <a:pPr>
-              <a:spcBef>
-                <a:spcPts val="400"/>
-              </a:spcBef>
-            </a:pPr>
-            <a:r>
-              <a:rPr sz="1000">
-                <a:solidFill>
-                  <a:srgbClr val="FFFFFF"/>
-                </a:solidFill>
-                <a:latin typeface="游ゴシック"/>
-              </a:rPr>
-              <a:t>・ バリューアップ型開発機能</a:t>
-            </a:r>
-          </a:p>
-          <a:p>
-            <a:pPr>
-              <a:spcBef>
-                <a:spcPts val="400"/>
-              </a:spcBef>
-            </a:pPr>
-            <a:r>
-              <a:rPr sz="1000">
-                <a:solidFill>
-                  <a:srgbClr val="FFFFFF"/>
-                </a:solidFill>
-                <a:latin typeface="游ゴシック"/>
-              </a:rPr>
-              <a:t>・ 開発〜Exit の収益サイクル確立</a:t>
-            </a:r>
-          </a:p>
-        </p:txBody>
-      </p:sp>
-      <p:sp>
-        <p:nvSpPr>
-          <p:cNvPr id="10" name="Rectangle 9"/>
-          <p:cNvSpPr/>
-          <p:nvPr/>
-        </p:nvSpPr>
-        <p:spPr>
-          <a:xfrm>
-            <a:off x="5669280" y="960120"/>
-            <a:ext cx="3017520" cy="2011680"/>
-          </a:xfrm>
-          <a:prstGeom prst="rect">
-            <a:avLst/>
-          </a:prstGeom>
-          <a:solidFill>
-            <a:srgbClr val="007A87"/>
+              <a:t>凡例（機能の三軸）</a:t>
+            </a:r>
+          </a:p>
+        </p:txBody>
+      </p:sp>
+      <p:sp>
+        <p:nvSpPr>
+          <p:cNvPr id="9" name="Rectangle 8"/>
+          <p:cNvSpPr/>
+          <p:nvPr/>
+        </p:nvSpPr>
+        <p:spPr>
+          <a:xfrm>
+            <a:off x="6492240" y="1115568"/>
+            <a:ext cx="777240" cy="201168"/>
+          </a:xfrm>
+          <a:prstGeom prst="rect">
+            <a:avLst/>
+          </a:prstGeom>
+          <a:solidFill>
+            <a:srgbClr val="0B2E5B"/>
           </a:solidFill>
           <a:ln>
             <a:noFill/>
@@ -8082,14 +7997,14 @@
       </p:sp>
       <p:sp>
         <p:nvSpPr>
-          <p:cNvPr id="11" name="TextBox 10"/>
+          <p:cNvPr id="10" name="TextBox 9"/>
           <p:cNvSpPr txBox="1"/>
           <p:nvPr/>
         </p:nvSpPr>
         <p:spPr>
           <a:xfrm>
-            <a:off x="5669280" y="1033272"/>
-            <a:ext cx="3017520" cy="347472"/>
+            <a:off x="6492240" y="1115568"/>
+            <a:ext cx="777240" cy="201168"/>
           </a:xfrm>
           <a:prstGeom prst="rect">
             <a:avLst/>
@@ -8104,116 +8019,29 @@
           <a:p>
             <a:pPr algn="ctr"/>
             <a:r>
-              <a:rPr sz="1500" b="1">
+              <a:rPr sz="800" b="1">
                 <a:solidFill>
                   <a:srgbClr val="FFFFFF"/>
                 </a:solidFill>
                 <a:latin typeface="游ゴシック"/>
               </a:rPr>
-              <a:t>運用事業（運用 × 運営）</a:t>
-            </a:r>
-          </a:p>
-        </p:txBody>
-      </p:sp>
-      <p:sp>
-        <p:nvSpPr>
-          <p:cNvPr id="12" name="TextBox 11"/>
-          <p:cNvSpPr txBox="1"/>
-          <p:nvPr/>
-        </p:nvSpPr>
-        <p:spPr>
-          <a:xfrm>
-            <a:off x="5806440" y="1463040"/>
-            <a:ext cx="2743200" cy="1463040"/>
-          </a:xfrm>
-          <a:prstGeom prst="rect">
-            <a:avLst/>
-          </a:prstGeom>
-          <a:noFill/>
-        </p:spPr>
-        <p:txBody>
-          <a:bodyPr wrap="square">
-            <a:spAutoFit/>
-          </a:bodyPr>
-          <a:lstStyle/>
-          <a:p>
-            <a:pPr>
-              <a:spcBef>
-                <a:spcPts val="400"/>
-              </a:spcBef>
-            </a:pPr>
-            <a:r>
-              <a:rPr sz="1000">
-                <a:solidFill>
-                  <a:srgbClr val="FFFFFF"/>
-                </a:solidFill>
-                <a:latin typeface="游ゴシック"/>
-              </a:rPr>
-              <a:t>・ 投資家基盤の拡充・パイプライン構築</a:t>
-            </a:r>
-          </a:p>
-          <a:p>
-            <a:pPr>
-              <a:spcBef>
-                <a:spcPts val="400"/>
-              </a:spcBef>
-            </a:pPr>
-            <a:r>
-              <a:rPr sz="1000">
-                <a:solidFill>
-                  <a:srgbClr val="FFFFFF"/>
-                </a:solidFill>
-                <a:latin typeface="游ゴシック"/>
-              </a:rPr>
-              <a:t>・ ファンド組成・アセットマネジメント体制</a:t>
-            </a:r>
-          </a:p>
-          <a:p>
-            <a:pPr>
-              <a:spcBef>
-                <a:spcPts val="400"/>
-              </a:spcBef>
-            </a:pPr>
-            <a:r>
-              <a:rPr sz="1000">
-                <a:solidFill>
-                  <a:srgbClr val="FFFFFF"/>
-                </a:solidFill>
-                <a:latin typeface="游ゴシック"/>
-              </a:rPr>
-              <a:t>・ AUM拡大・投資判断力の体系化</a:t>
-            </a:r>
-          </a:p>
-          <a:p>
-            <a:pPr>
-              <a:spcBef>
-                <a:spcPts val="400"/>
-              </a:spcBef>
-            </a:pPr>
-            <a:r>
-              <a:rPr sz="1000">
-                <a:solidFill>
-                  <a:srgbClr val="FFFFFF"/>
-                </a:solidFill>
-                <a:latin typeface="游ゴシック"/>
-              </a:rPr>
-              <a:t>・ NOI拡大・都市運営プラットフォーム</a:t>
-            </a:r>
-          </a:p>
-        </p:txBody>
-      </p:sp>
-      <p:sp>
-        <p:nvSpPr>
-          <p:cNvPr id="13" name="Right Arrow 12"/>
-          <p:cNvSpPr/>
-          <p:nvPr/>
-        </p:nvSpPr>
-        <p:spPr>
-          <a:xfrm>
-            <a:off x="3520439" y="1280160"/>
-            <a:ext cx="2103120" cy="502920"/>
-          </a:xfrm>
-          <a:prstGeom prst="rightArrow">
+              <a:t>D 開発力</a:t>
+            </a:r>
+          </a:p>
+        </p:txBody>
+      </p:sp>
+      <p:sp>
+        <p:nvSpPr>
+          <p:cNvPr id="11" name="Rectangle 10"/>
+          <p:cNvSpPr/>
+          <p:nvPr/>
+        </p:nvSpPr>
+        <p:spPr>
+          <a:xfrm>
+            <a:off x="7287768" y="1115568"/>
+            <a:ext cx="777240" cy="201168"/>
+          </a:xfrm>
+          <a:prstGeom prst="rect">
             <a:avLst/>
           </a:prstGeom>
           <a:solidFill>
@@ -8222,6 +8050,7 @@
           <a:ln>
             <a:noFill/>
           </a:ln>
+          <a:effectLst/>
         </p:spPr>
         <p:style>
           <a:lnRef idx="1">
@@ -8238,34 +8067,60 @@
           </a:fontRef>
         </p:style>
         <p:txBody>
-          <a:bodyPr rtlCol="0" anchor="ctr" wrap="square" lIns="182880" rIns="182880"/>
+          <a:bodyPr rtlCol="0" anchor="ctr"/>
           <a:lstStyle/>
           <a:p>
             <a:pPr algn="ctr"/>
-            <a:r>
-              <a:rPr sz="1100" b="1">
+          </a:p>
+        </p:txBody>
+      </p:sp>
+      <p:sp>
+        <p:nvSpPr>
+          <p:cNvPr id="12" name="TextBox 11"/>
+          <p:cNvSpPr txBox="1"/>
+          <p:nvPr/>
+        </p:nvSpPr>
+        <p:spPr>
+          <a:xfrm>
+            <a:off x="7287768" y="1115568"/>
+            <a:ext cx="777240" cy="201168"/>
+          </a:xfrm>
+          <a:prstGeom prst="rect">
+            <a:avLst/>
+          </a:prstGeom>
+          <a:noFill/>
+        </p:spPr>
+        <p:txBody>
+          <a:bodyPr wrap="square" lIns="73152" rIns="73152" tIns="36576" bIns="36576" anchor="ctr">
+            <a:spAutoFit/>
+          </a:bodyPr>
+          <a:lstStyle/>
+          <a:p>
+            <a:pPr algn="ctr"/>
+            <a:r>
+              <a:rPr sz="800" b="1">
                 <a:solidFill>
                   <a:srgbClr val="FFFFFF"/>
                 </a:solidFill>
                 <a:latin typeface="游ゴシック"/>
               </a:rPr>
-              <a:t>良質アセット供給・開発Exit収益</a:t>
-            </a:r>
-          </a:p>
-        </p:txBody>
-      </p:sp>
-      <p:sp>
-        <p:nvSpPr>
-          <p:cNvPr id="14" name="Left Arrow 13"/>
-          <p:cNvSpPr/>
-          <p:nvPr/>
-        </p:nvSpPr>
-        <p:spPr>
-          <a:xfrm>
-            <a:off x="3520439" y="2148840"/>
-            <a:ext cx="2103120" cy="502920"/>
-          </a:xfrm>
-          <a:prstGeom prst="leftArrow">
+              <a:t>A 運用力</a:t>
+            </a:r>
+          </a:p>
+        </p:txBody>
+      </p:sp>
+      <p:sp>
+        <p:nvSpPr>
+          <p:cNvPr id="13" name="Rectangle 12"/>
+          <p:cNvSpPr/>
+          <p:nvPr/>
+        </p:nvSpPr>
+        <p:spPr>
+          <a:xfrm>
+            <a:off x="8083296" y="1115568"/>
+            <a:ext cx="777240" cy="201168"/>
+          </a:xfrm>
+          <a:prstGeom prst="rect">
             <a:avLst/>
           </a:prstGeom>
           <a:solidFill>
@@ -8274,6 +8129,7 @@
           <a:ln>
             <a:noFill/>
           </a:ln>
+          <a:effectLst/>
         </p:spPr>
         <p:style>
           <a:lnRef idx="1">
@@ -8290,18 +8146,44 @@
           </a:fontRef>
         </p:style>
         <p:txBody>
-          <a:bodyPr rtlCol="0" anchor="ctr" wrap="square" lIns="182880" rIns="182880"/>
+          <a:bodyPr rtlCol="0" anchor="ctr"/>
           <a:lstStyle/>
           <a:p>
             <a:pPr algn="ctr"/>
-            <a:r>
-              <a:rPr sz="1100" b="1">
+          </a:p>
+        </p:txBody>
+      </p:sp>
+      <p:sp>
+        <p:nvSpPr>
+          <p:cNvPr id="14" name="TextBox 13"/>
+          <p:cNvSpPr txBox="1"/>
+          <p:nvPr/>
+        </p:nvSpPr>
+        <p:spPr>
+          <a:xfrm>
+            <a:off x="8083296" y="1115568"/>
+            <a:ext cx="777240" cy="201168"/>
+          </a:xfrm>
+          <a:prstGeom prst="rect">
+            <a:avLst/>
+          </a:prstGeom>
+          <a:noFill/>
+        </p:spPr>
+        <p:txBody>
+          <a:bodyPr wrap="square" lIns="73152" rIns="73152" tIns="36576" bIns="36576" anchor="ctr">
+            <a:spAutoFit/>
+          </a:bodyPr>
+          <a:lstStyle/>
+          <a:p>
+            <a:pPr algn="ctr"/>
+            <a:r>
+              <a:rPr sz="800" b="1">
                 <a:solidFill>
                   <a:srgbClr val="FFFFFF"/>
                 </a:solidFill>
                 <a:latin typeface="游ゴシック"/>
               </a:rPr>
-              <a:t>資金調達力・運用収益・市場知見を還流</a:t>
+              <a:t>O 運営力</a:t>
             </a:r>
           </a:p>
         </p:txBody>
@@ -8314,19 +8196,17 @@
         </p:nvSpPr>
         <p:spPr>
           <a:xfrm>
-            <a:off x="457200" y="3154680"/>
-            <a:ext cx="8229600" cy="1325880"/>
-          </a:xfrm>
-          <a:prstGeom prst="rect">
-            <a:avLst/>
-          </a:prstGeom>
-          <a:solidFill>
-            <a:srgbClr val="FFFFFF"/>
-          </a:solidFill>
-          <a:ln w="9525">
-            <a:solidFill>
-              <a:srgbClr val="E5E7EB"/>
-            </a:solidFill>
+            <a:off x="182880" y="3840480"/>
+            <a:ext cx="2057400" cy="822959"/>
+          </a:xfrm>
+          <a:prstGeom prst="rect">
+            <a:avLst/>
+          </a:prstGeom>
+          <a:solidFill>
+            <a:srgbClr val="666A73"/>
+          </a:solidFill>
+          <a:ln>
+            <a:noFill/>
           </a:ln>
           <a:effectLst/>
         </p:spPr>
@@ -8360,8 +8240,8 @@
         </p:nvSpPr>
         <p:spPr>
           <a:xfrm>
-            <a:off x="594360" y="3227832"/>
-            <a:ext cx="7955279" cy="292608"/>
+            <a:off x="256032" y="3895344"/>
+            <a:ext cx="1911095" cy="256032"/>
           </a:xfrm>
           <a:prstGeom prst="rect">
             <a:avLst/>
@@ -8376,33 +8256,103 @@
           <a:p>
             <a:pPr algn="l"/>
             <a:r>
-              <a:rPr sz="1200" b="1">
-                <a:solidFill>
-                  <a:srgbClr val="0B2E5B"/>
+              <a:rPr sz="1100" b="1">
+                <a:solidFill>
+                  <a:srgbClr val="FFFFFF"/>
                 </a:solidFill>
                 <a:latin typeface="游ゴシック"/>
               </a:rPr>
-              <a:t>好循環による成果（Outcome）</a:t>
-            </a:r>
-          </a:p>
-        </p:txBody>
-      </p:sp>
-      <p:sp>
-        <p:nvSpPr>
-          <p:cNvPr id="17" name="Rectangle 16"/>
-          <p:cNvSpPr/>
-          <p:nvPr/>
-        </p:nvSpPr>
-        <p:spPr>
-          <a:xfrm>
-            <a:off x="594360" y="3593592"/>
-            <a:ext cx="2560320" cy="749808"/>
-          </a:xfrm>
-          <a:prstGeom prst="rect">
-            <a:avLst/>
-          </a:prstGeom>
-          <a:solidFill>
-            <a:srgbClr val="0B2E5B"/>
+              <a:t>① 現在 (As is)</a:t>
+            </a:r>
+          </a:p>
+        </p:txBody>
+      </p:sp>
+      <p:sp>
+        <p:nvSpPr>
+          <p:cNvPr id="17" name="TextBox 16"/>
+          <p:cNvSpPr txBox="1"/>
+          <p:nvPr/>
+        </p:nvSpPr>
+        <p:spPr>
+          <a:xfrm>
+            <a:off x="1280160" y="3895344"/>
+            <a:ext cx="868680" cy="256032"/>
+          </a:xfrm>
+          <a:prstGeom prst="rect">
+            <a:avLst/>
+          </a:prstGeom>
+          <a:noFill/>
+        </p:spPr>
+        <p:txBody>
+          <a:bodyPr wrap="square" lIns="73152" rIns="73152" tIns="36576" bIns="36576" anchor="t">
+            <a:spAutoFit/>
+          </a:bodyPr>
+          <a:lstStyle/>
+          <a:p>
+            <a:pPr algn="r"/>
+            <a:r>
+              <a:rPr sz="900" b="1">
+                <a:solidFill>
+                  <a:srgbClr val="FFFFFF"/>
+                </a:solidFill>
+                <a:latin typeface="游ゴシック"/>
+              </a:rPr>
+              <a:t>累計 0/10</a:t>
+            </a:r>
+          </a:p>
+        </p:txBody>
+      </p:sp>
+      <p:sp>
+        <p:nvSpPr>
+          <p:cNvPr id="18" name="TextBox 17"/>
+          <p:cNvSpPr txBox="1"/>
+          <p:nvPr/>
+        </p:nvSpPr>
+        <p:spPr>
+          <a:xfrm>
+            <a:off x="256032" y="4389120"/>
+            <a:ext cx="1911095" cy="228600"/>
+          </a:xfrm>
+          <a:prstGeom prst="rect">
+            <a:avLst/>
+          </a:prstGeom>
+          <a:noFill/>
+        </p:spPr>
+        <p:txBody>
+          <a:bodyPr wrap="square" lIns="73152" rIns="73152" tIns="36576" bIns="36576" anchor="ctr">
+            <a:spAutoFit/>
+          </a:bodyPr>
+          <a:lstStyle/>
+          <a:p>
+            <a:pPr algn="l"/>
+            <a:r>
+              <a:rPr sz="900" b="1">
+                <a:solidFill>
+                  <a:srgbClr val="FFFFFF"/>
+                </a:solidFill>
+                <a:latin typeface="游ゴシック"/>
+              </a:rPr>
+              <a:t>出発点：既獲得の機能のみ</a:t>
+            </a:r>
+          </a:p>
+        </p:txBody>
+      </p:sp>
+      <p:sp>
+        <p:nvSpPr>
+          <p:cNvPr id="19" name="Rectangle 18"/>
+          <p:cNvSpPr/>
+          <p:nvPr/>
+        </p:nvSpPr>
+        <p:spPr>
+          <a:xfrm>
+            <a:off x="2295144" y="3017520"/>
+            <a:ext cx="2057400" cy="1645919"/>
+          </a:xfrm>
+          <a:prstGeom prst="rect">
+            <a:avLst/>
+          </a:prstGeom>
+          <a:solidFill>
+            <a:srgbClr val="1F4E8F"/>
           </a:solidFill>
           <a:ln>
             <a:noFill/>
@@ -8433,14 +8383,14 @@
       </p:sp>
       <p:sp>
         <p:nvSpPr>
-          <p:cNvPr id="18" name="TextBox 17"/>
+          <p:cNvPr id="20" name="TextBox 19"/>
           <p:cNvSpPr txBox="1"/>
           <p:nvPr/>
         </p:nvSpPr>
         <p:spPr>
           <a:xfrm>
-            <a:off x="704088" y="3648456"/>
-            <a:ext cx="2340863" cy="292608"/>
+            <a:off x="2368296" y="3072384"/>
+            <a:ext cx="1911095" cy="256032"/>
           </a:xfrm>
           <a:prstGeom prst="rect">
             <a:avLst/>
@@ -8461,21 +8411,21 @@
                 </a:solidFill>
                 <a:latin typeface="游ゴシック"/>
               </a:rPr>
-              <a:t>キャッシュ・フロー拡大</a:t>
-            </a:r>
-          </a:p>
-        </p:txBody>
-      </p:sp>
-      <p:sp>
-        <p:nvSpPr>
-          <p:cNvPr id="19" name="TextBox 18"/>
+              <a:t>② 戦略投資フェーズⅠ</a:t>
+            </a:r>
+          </a:p>
+        </p:txBody>
+      </p:sp>
+      <p:sp>
+        <p:nvSpPr>
+          <p:cNvPr id="21" name="TextBox 20"/>
           <p:cNvSpPr txBox="1"/>
           <p:nvPr/>
         </p:nvSpPr>
         <p:spPr>
           <a:xfrm>
-            <a:off x="704088" y="3959352"/>
-            <a:ext cx="2340863" cy="347472"/>
+            <a:off x="3392424" y="3072384"/>
+            <a:ext cx="868680" cy="256032"/>
           </a:xfrm>
           <a:prstGeom prst="rect">
             <a:avLst/>
@@ -8488,35 +8438,218 @@
           </a:bodyPr>
           <a:lstStyle/>
           <a:p>
+            <a:pPr algn="r"/>
+            <a:r>
+              <a:rPr sz="900" b="1">
+                <a:solidFill>
+                  <a:srgbClr val="FFFFFF"/>
+                </a:solidFill>
+                <a:latin typeface="游ゴシック"/>
+              </a:rPr>
+              <a:t>累計 5/10</a:t>
+            </a:r>
+          </a:p>
+        </p:txBody>
+      </p:sp>
+      <p:sp>
+        <p:nvSpPr>
+          <p:cNvPr id="22" name="TextBox 21"/>
+          <p:cNvSpPr txBox="1"/>
+          <p:nvPr/>
+        </p:nvSpPr>
+        <p:spPr>
+          <a:xfrm>
+            <a:off x="2368296" y="3401568"/>
+            <a:ext cx="1911095" cy="969263"/>
+          </a:xfrm>
+          <a:prstGeom prst="rect">
+            <a:avLst/>
+          </a:prstGeom>
+          <a:noFill/>
+        </p:spPr>
+        <p:txBody>
+          <a:bodyPr wrap="square">
+            <a:spAutoFit/>
+          </a:bodyPr>
+          <a:lstStyle/>
+          <a:p>
+            <a:pPr>
+              <a:spcBef>
+                <a:spcPts val="200"/>
+              </a:spcBef>
+            </a:pPr>
+            <a:r>
+              <a:rPr sz="800" b="1">
+                <a:solidFill>
+                  <a:srgbClr val="FFFFFF"/>
+                </a:solidFill>
+                <a:latin typeface="游ゴシック"/>
+              </a:rPr>
+              <a:t>[D] </a:t>
+            </a:r>
+            <a:r>
+              <a:rPr sz="900">
+                <a:solidFill>
+                  <a:srgbClr val="FFFFFF"/>
+                </a:solidFill>
+                <a:latin typeface="游ゴシック"/>
+              </a:rPr>
+              <a:t>多様なアセットクラスへの対応力</a:t>
+            </a:r>
+          </a:p>
+          <a:p>
+            <a:pPr>
+              <a:spcBef>
+                <a:spcPts val="200"/>
+              </a:spcBef>
+            </a:pPr>
+            <a:r>
+              <a:rPr sz="800" b="1">
+                <a:solidFill>
+                  <a:srgbClr val="FFFFFF"/>
+                </a:solidFill>
+                <a:latin typeface="游ゴシック"/>
+              </a:rPr>
+              <a:t>[D] </a:t>
+            </a:r>
+            <a:r>
+              <a:rPr sz="900">
+                <a:solidFill>
+                  <a:srgbClr val="FFFFFF"/>
+                </a:solidFill>
+                <a:latin typeface="游ゴシック"/>
+              </a:rPr>
+              <a:t>産業・商業複合型 企画・ソーシング力</a:t>
+            </a:r>
+          </a:p>
+          <a:p>
+            <a:pPr>
+              <a:spcBef>
+                <a:spcPts val="200"/>
+              </a:spcBef>
+            </a:pPr>
+            <a:r>
+              <a:rPr sz="800" b="1">
+                <a:solidFill>
+                  <a:srgbClr val="FFFFFF"/>
+                </a:solidFill>
+                <a:latin typeface="游ゴシック"/>
+              </a:rPr>
+              <a:t>[A] </a:t>
+            </a:r>
+            <a:r>
+              <a:rPr sz="900">
+                <a:solidFill>
+                  <a:srgbClr val="FFFFFF"/>
+                </a:solidFill>
+                <a:latin typeface="游ゴシック"/>
+              </a:rPr>
+              <a:t>投資家基盤の拡充・パイプライン構築</a:t>
+            </a:r>
+          </a:p>
+          <a:p>
+            <a:pPr>
+              <a:spcBef>
+                <a:spcPts val="200"/>
+              </a:spcBef>
+            </a:pPr>
+            <a:r>
+              <a:rPr sz="800" b="1">
+                <a:solidFill>
+                  <a:srgbClr val="FFFFFF"/>
+                </a:solidFill>
+                <a:latin typeface="游ゴシック"/>
+              </a:rPr>
+              <a:t>[A] </a:t>
+            </a:r>
+            <a:r>
+              <a:rPr sz="900">
+                <a:solidFill>
+                  <a:srgbClr val="FFFFFF"/>
+                </a:solidFill>
+                <a:latin typeface="游ゴシック"/>
+              </a:rPr>
+              <a:t>ファンド組成・AM体制構築</a:t>
+            </a:r>
+          </a:p>
+          <a:p>
+            <a:pPr>
+              <a:spcBef>
+                <a:spcPts val="200"/>
+              </a:spcBef>
+            </a:pPr>
+            <a:r>
+              <a:rPr sz="800" b="1">
+                <a:solidFill>
+                  <a:srgbClr val="FFFFFF"/>
+                </a:solidFill>
+                <a:latin typeface="游ゴシック"/>
+              </a:rPr>
+              <a:t>[O] </a:t>
+            </a:r>
+            <a:r>
+              <a:rPr sz="900">
+                <a:solidFill>
+                  <a:srgbClr val="FFFFFF"/>
+                </a:solidFill>
+                <a:latin typeface="游ゴシック"/>
+              </a:rPr>
+              <a:t>NOI拡大・バリューアップ機能</a:t>
+            </a:r>
+          </a:p>
+        </p:txBody>
+      </p:sp>
+      <p:sp>
+        <p:nvSpPr>
+          <p:cNvPr id="23" name="TextBox 22"/>
+          <p:cNvSpPr txBox="1"/>
+          <p:nvPr/>
+        </p:nvSpPr>
+        <p:spPr>
+          <a:xfrm>
+            <a:off x="2368296" y="4389120"/>
+            <a:ext cx="1911095" cy="228600"/>
+          </a:xfrm>
+          <a:prstGeom prst="rect">
+            <a:avLst/>
+          </a:prstGeom>
+          <a:noFill/>
+        </p:spPr>
+        <p:txBody>
+          <a:bodyPr wrap="square" lIns="73152" rIns="73152" tIns="36576" bIns="36576" anchor="ctr">
+            <a:spAutoFit/>
+          </a:bodyPr>
+          <a:lstStyle/>
+          <a:p>
             <a:pPr algn="l"/>
             <a:r>
-              <a:rPr sz="800" b="0">
+              <a:rPr sz="900" b="1">
                 <a:solidFill>
                   <a:srgbClr val="FFFFFF"/>
                 </a:solidFill>
                 <a:latin typeface="游ゴシック"/>
               </a:rPr>
-              <a:t>開発Exit益 ＋ 運用手数料・NOI の積上げ</a:t>
-            </a:r>
-          </a:p>
-        </p:txBody>
-      </p:sp>
-      <p:sp>
-        <p:nvSpPr>
-          <p:cNvPr id="20" name="Rectangle 19"/>
-          <p:cNvSpPr/>
-          <p:nvPr/>
-        </p:nvSpPr>
-        <p:spPr>
-          <a:xfrm>
-            <a:off x="3246120" y="3593592"/>
-            <a:ext cx="2560320" cy="749808"/>
-          </a:xfrm>
-          <a:prstGeom prst="rect">
-            <a:avLst/>
-          </a:prstGeom>
-          <a:solidFill>
-            <a:srgbClr val="1F4E8F"/>
+              <a:t>+ 5機能（基盤構築）</a:t>
+            </a:r>
+          </a:p>
+        </p:txBody>
+      </p:sp>
+      <p:sp>
+        <p:nvSpPr>
+          <p:cNvPr id="24" name="Rectangle 23"/>
+          <p:cNvSpPr/>
+          <p:nvPr/>
+        </p:nvSpPr>
+        <p:spPr>
+          <a:xfrm>
+            <a:off x="4407408" y="2194560"/>
+            <a:ext cx="2057400" cy="2468879"/>
+          </a:xfrm>
+          <a:prstGeom prst="rect">
+            <a:avLst/>
+          </a:prstGeom>
+          <a:solidFill>
+            <a:srgbClr val="007A87"/>
           </a:solidFill>
           <a:ln>
             <a:noFill/>
@@ -8547,14 +8680,14 @@
       </p:sp>
       <p:sp>
         <p:nvSpPr>
-          <p:cNvPr id="21" name="TextBox 20"/>
+          <p:cNvPr id="25" name="TextBox 24"/>
           <p:cNvSpPr txBox="1"/>
           <p:nvPr/>
         </p:nvSpPr>
         <p:spPr>
           <a:xfrm>
-            <a:off x="3355848" y="3648456"/>
-            <a:ext cx="2340863" cy="292608"/>
+            <a:off x="4480560" y="2249424"/>
+            <a:ext cx="1911095" cy="256032"/>
           </a:xfrm>
           <a:prstGeom prst="rect">
             <a:avLst/>
@@ -8575,21 +8708,21 @@
                 </a:solidFill>
                 <a:latin typeface="游ゴシック"/>
               </a:rPr>
-              <a:t>資本効率（ROE）の改善</a:t>
-            </a:r>
-          </a:p>
-        </p:txBody>
-      </p:sp>
-      <p:sp>
-        <p:nvSpPr>
-          <p:cNvPr id="22" name="TextBox 21"/>
+              <a:t>③ 戦略投資フェーズⅡ</a:t>
+            </a:r>
+          </a:p>
+        </p:txBody>
+      </p:sp>
+      <p:sp>
+        <p:nvSpPr>
+          <p:cNvPr id="26" name="TextBox 25"/>
           <p:cNvSpPr txBox="1"/>
           <p:nvPr/>
         </p:nvSpPr>
         <p:spPr>
           <a:xfrm>
-            <a:off x="3355848" y="3959352"/>
-            <a:ext cx="2340863" cy="347472"/>
+            <a:off x="5504688" y="2249424"/>
+            <a:ext cx="868680" cy="256032"/>
           </a:xfrm>
           <a:prstGeom prst="rect">
             <a:avLst/>
@@ -8602,35 +8735,193 @@
           </a:bodyPr>
           <a:lstStyle/>
           <a:p>
+            <a:pPr algn="r"/>
+            <a:r>
+              <a:rPr sz="900" b="1">
+                <a:solidFill>
+                  <a:srgbClr val="FFFFFF"/>
+                </a:solidFill>
+                <a:latin typeface="游ゴシック"/>
+              </a:rPr>
+              <a:t>累計 9/10</a:t>
+            </a:r>
+          </a:p>
+        </p:txBody>
+      </p:sp>
+      <p:sp>
+        <p:nvSpPr>
+          <p:cNvPr id="27" name="TextBox 26"/>
+          <p:cNvSpPr txBox="1"/>
+          <p:nvPr/>
+        </p:nvSpPr>
+        <p:spPr>
+          <a:xfrm>
+            <a:off x="4480560" y="2578608"/>
+            <a:ext cx="1911095" cy="1792223"/>
+          </a:xfrm>
+          <a:prstGeom prst="rect">
+            <a:avLst/>
+          </a:prstGeom>
+          <a:noFill/>
+        </p:spPr>
+        <p:txBody>
+          <a:bodyPr wrap="square">
+            <a:spAutoFit/>
+          </a:bodyPr>
+          <a:lstStyle/>
+          <a:p>
+            <a:pPr>
+              <a:spcBef>
+                <a:spcPts val="200"/>
+              </a:spcBef>
+            </a:pPr>
+            <a:r>
+              <a:rPr sz="800" b="1">
+                <a:solidFill>
+                  <a:srgbClr val="FFFFFF"/>
+                </a:solidFill>
+                <a:latin typeface="游ゴシック"/>
+              </a:rPr>
+              <a:t>[D] </a:t>
+            </a:r>
+            <a:r>
+              <a:rPr sz="900">
+                <a:solidFill>
+                  <a:srgbClr val="FFFFFF"/>
+                </a:solidFill>
+                <a:latin typeface="游ゴシック"/>
+              </a:rPr>
+              <a:t>バリューアップ型開発機能</a:t>
+            </a:r>
+          </a:p>
+          <a:p>
+            <a:pPr>
+              <a:spcBef>
+                <a:spcPts val="200"/>
+              </a:spcBef>
+            </a:pPr>
+            <a:r>
+              <a:rPr sz="800" b="1">
+                <a:solidFill>
+                  <a:srgbClr val="FFFFFF"/>
+                </a:solidFill>
+                <a:latin typeface="游ゴシック"/>
+              </a:rPr>
+              <a:t>[D] </a:t>
+            </a:r>
+            <a:r>
+              <a:rPr sz="900">
+                <a:solidFill>
+                  <a:srgbClr val="FFFFFF"/>
+                </a:solidFill>
+                <a:latin typeface="游ゴシック"/>
+              </a:rPr>
+              <a:t>開発〜Exit の収益サイクル確立</a:t>
+            </a:r>
+          </a:p>
+          <a:p>
+            <a:pPr>
+              <a:spcBef>
+                <a:spcPts val="200"/>
+              </a:spcBef>
+            </a:pPr>
+            <a:r>
+              <a:rPr sz="800" b="1">
+                <a:solidFill>
+                  <a:srgbClr val="FFFFFF"/>
+                </a:solidFill>
+                <a:latin typeface="游ゴシック"/>
+              </a:rPr>
+              <a:t>[A] </a:t>
+            </a:r>
+            <a:r>
+              <a:rPr sz="900">
+                <a:solidFill>
+                  <a:srgbClr val="FFFFFF"/>
+                </a:solidFill>
+                <a:latin typeface="游ゴシック"/>
+              </a:rPr>
+              <a:t>AUM拡大・投資判断力の体系化</a:t>
+            </a:r>
+          </a:p>
+          <a:p>
+            <a:pPr>
+              <a:spcBef>
+                <a:spcPts val="200"/>
+              </a:spcBef>
+            </a:pPr>
+            <a:r>
+              <a:rPr sz="800" b="1">
+                <a:solidFill>
+                  <a:srgbClr val="FFFFFF"/>
+                </a:solidFill>
+                <a:latin typeface="游ゴシック"/>
+              </a:rPr>
+              <a:t>[O] </a:t>
+            </a:r>
+            <a:r>
+              <a:rPr sz="900">
+                <a:solidFill>
+                  <a:srgbClr val="FFFFFF"/>
+                </a:solidFill>
+                <a:latin typeface="游ゴシック"/>
+              </a:rPr>
+              <a:t>関連事業の再編・都市運営PF確立</a:t>
+            </a:r>
+          </a:p>
+        </p:txBody>
+      </p:sp>
+      <p:sp>
+        <p:nvSpPr>
+          <p:cNvPr id="28" name="TextBox 27"/>
+          <p:cNvSpPr txBox="1"/>
+          <p:nvPr/>
+        </p:nvSpPr>
+        <p:spPr>
+          <a:xfrm>
+            <a:off x="4480560" y="4389120"/>
+            <a:ext cx="1911095" cy="228600"/>
+          </a:xfrm>
+          <a:prstGeom prst="rect">
+            <a:avLst/>
+          </a:prstGeom>
+          <a:noFill/>
+        </p:spPr>
+        <p:txBody>
+          <a:bodyPr wrap="square" lIns="73152" rIns="73152" tIns="36576" bIns="36576" anchor="ctr">
+            <a:spAutoFit/>
+          </a:bodyPr>
+          <a:lstStyle/>
+          <a:p>
             <a:pPr algn="l"/>
             <a:r>
-              <a:rPr sz="800" b="0">
+              <a:rPr sz="900" b="1">
                 <a:solidFill>
                   <a:srgbClr val="FFFFFF"/>
                 </a:solidFill>
                 <a:latin typeface="游ゴシック"/>
               </a:rPr>
-              <a:t>アセット回転型モデルで自己資本の生産性向上</a:t>
-            </a:r>
-          </a:p>
-        </p:txBody>
-      </p:sp>
-      <p:sp>
-        <p:nvSpPr>
-          <p:cNvPr id="23" name="Rectangle 22"/>
-          <p:cNvSpPr/>
-          <p:nvPr/>
-        </p:nvSpPr>
-        <p:spPr>
-          <a:xfrm>
-            <a:off x="5897880" y="3593592"/>
-            <a:ext cx="2560320" cy="749808"/>
-          </a:xfrm>
-          <a:prstGeom prst="rect">
-            <a:avLst/>
-          </a:prstGeom>
-          <a:solidFill>
-            <a:srgbClr val="007A87"/>
+              <a:t>+ 4機能（事業拡大）</a:t>
+            </a:r>
+          </a:p>
+        </p:txBody>
+      </p:sp>
+      <p:sp>
+        <p:nvSpPr>
+          <p:cNvPr id="29" name="Rectangle 28"/>
+          <p:cNvSpPr/>
+          <p:nvPr/>
+        </p:nvSpPr>
+        <p:spPr>
+          <a:xfrm>
+            <a:off x="6519672" y="1371600"/>
+            <a:ext cx="2057400" cy="3291839"/>
+          </a:xfrm>
+          <a:prstGeom prst="rect">
+            <a:avLst/>
+          </a:prstGeom>
+          <a:solidFill>
+            <a:srgbClr val="0B2E5B"/>
           </a:solidFill>
           <a:ln>
             <a:noFill/>
@@ -8661,14 +8952,14 @@
       </p:sp>
       <p:sp>
         <p:nvSpPr>
-          <p:cNvPr id="24" name="TextBox 23"/>
+          <p:cNvPr id="30" name="TextBox 29"/>
           <p:cNvSpPr txBox="1"/>
           <p:nvPr/>
         </p:nvSpPr>
         <p:spPr>
           <a:xfrm>
-            <a:off x="6007608" y="3648456"/>
-            <a:ext cx="2340863" cy="292608"/>
+            <a:off x="6592824" y="1426464"/>
+            <a:ext cx="1911095" cy="256032"/>
           </a:xfrm>
           <a:prstGeom prst="rect">
             <a:avLst/>
@@ -8689,21 +8980,21 @@
                 </a:solidFill>
                 <a:latin typeface="游ゴシック"/>
               </a:rPr>
-              <a:t>AUM の持続的成長</a:t>
-            </a:r>
-          </a:p>
-        </p:txBody>
-      </p:sp>
-      <p:sp>
-        <p:nvSpPr>
-          <p:cNvPr id="25" name="TextBox 24"/>
+              <a:t>④ 都市開発事業の確立</a:t>
+            </a:r>
+          </a:p>
+        </p:txBody>
+      </p:sp>
+      <p:sp>
+        <p:nvSpPr>
+          <p:cNvPr id="31" name="TextBox 30"/>
           <p:cNvSpPr txBox="1"/>
           <p:nvPr/>
         </p:nvSpPr>
         <p:spPr>
           <a:xfrm>
-            <a:off x="6007608" y="3959352"/>
-            <a:ext cx="2340863" cy="347472"/>
+            <a:off x="7616951" y="1426464"/>
+            <a:ext cx="868680" cy="256032"/>
           </a:xfrm>
           <a:prstGeom prst="rect">
             <a:avLst/>
@@ -8716,29 +9007,112 @@
           </a:bodyPr>
           <a:lstStyle/>
           <a:p>
+            <a:pPr algn="r"/>
+            <a:r>
+              <a:rPr sz="900" b="1">
+                <a:solidFill>
+                  <a:srgbClr val="FFFFFF"/>
+                </a:solidFill>
+                <a:latin typeface="游ゴシック"/>
+              </a:rPr>
+              <a:t>累計 10/10</a:t>
+            </a:r>
+          </a:p>
+        </p:txBody>
+      </p:sp>
+      <p:sp>
+        <p:nvSpPr>
+          <p:cNvPr id="32" name="TextBox 31"/>
+          <p:cNvSpPr txBox="1"/>
+          <p:nvPr/>
+        </p:nvSpPr>
+        <p:spPr>
+          <a:xfrm>
+            <a:off x="6592824" y="1755648"/>
+            <a:ext cx="1911095" cy="2615183"/>
+          </a:xfrm>
+          <a:prstGeom prst="rect">
+            <a:avLst/>
+          </a:prstGeom>
+          <a:noFill/>
+        </p:spPr>
+        <p:txBody>
+          <a:bodyPr wrap="square">
+            <a:spAutoFit/>
+          </a:bodyPr>
+          <a:lstStyle/>
+          <a:p>
+            <a:pPr>
+              <a:spcBef>
+                <a:spcPts val="200"/>
+              </a:spcBef>
+            </a:pPr>
+            <a:r>
+              <a:rPr sz="800" b="1">
+                <a:solidFill>
+                  <a:srgbClr val="FFFFFF"/>
+                </a:solidFill>
+                <a:latin typeface="游ゴシック"/>
+              </a:rPr>
+              <a:t>[A] </a:t>
+            </a:r>
+            <a:r>
+              <a:rPr sz="900">
+                <a:solidFill>
+                  <a:srgbClr val="FFFFFF"/>
+                </a:solidFill>
+                <a:latin typeface="游ゴシック"/>
+              </a:rPr>
+              <a:t>高付加価値事業の収益化</a:t>
+            </a:r>
+          </a:p>
+        </p:txBody>
+      </p:sp>
+      <p:sp>
+        <p:nvSpPr>
+          <p:cNvPr id="33" name="TextBox 32"/>
+          <p:cNvSpPr txBox="1"/>
+          <p:nvPr/>
+        </p:nvSpPr>
+        <p:spPr>
+          <a:xfrm>
+            <a:off x="6592824" y="4389120"/>
+            <a:ext cx="1911095" cy="228600"/>
+          </a:xfrm>
+          <a:prstGeom prst="rect">
+            <a:avLst/>
+          </a:prstGeom>
+          <a:noFill/>
+        </p:spPr>
+        <p:txBody>
+          <a:bodyPr wrap="square" lIns="73152" rIns="73152" tIns="36576" bIns="36576" anchor="ctr">
+            <a:spAutoFit/>
+          </a:bodyPr>
+          <a:lstStyle/>
+          <a:p>
             <a:pPr algn="l"/>
             <a:r>
-              <a:rPr sz="800" b="0">
+              <a:rPr sz="900" b="1">
                 <a:solidFill>
                   <a:srgbClr val="FFFFFF"/>
                 </a:solidFill>
                 <a:latin typeface="游ゴシック"/>
               </a:rPr>
-              <a:t>投資家基盤拡大×開発パイプライン継続供給</a:t>
-            </a:r>
-          </a:p>
-        </p:txBody>
-      </p:sp>
-      <p:sp>
-        <p:nvSpPr>
-          <p:cNvPr id="26" name="TextBox 25"/>
+              <a:t>+ 1機能 — 三軸の好循環が完成</a:t>
+            </a:r>
+          </a:p>
+        </p:txBody>
+      </p:sp>
+      <p:sp>
+        <p:nvSpPr>
+          <p:cNvPr id="34" name="TextBox 33"/>
           <p:cNvSpPr txBox="1"/>
           <p:nvPr/>
         </p:nvSpPr>
         <p:spPr>
           <a:xfrm>
-            <a:off x="274320" y="4846320"/>
-            <a:ext cx="8595360" cy="274320"/>
+            <a:off x="274320" y="868680"/>
+            <a:ext cx="5943600" cy="274320"/>
           </a:xfrm>
           <a:prstGeom prst="rect">
             <a:avLst/>
@@ -8753,13 +9127,48 @@
           <a:p>
             <a:pPr algn="l"/>
             <a:r>
+              <a:rPr sz="1000" b="1">
+                <a:solidFill>
+                  <a:srgbClr val="0B2E5B"/>
+                </a:solidFill>
+                <a:latin typeface="游ゴシック"/>
+              </a:rPr>
+              <a:t>■ 各フェーズで機能を上乗せ（cumulative）し、最終フェーズで開発×運用×運営の好循環が完成</a:t>
+            </a:r>
+          </a:p>
+        </p:txBody>
+      </p:sp>
+      <p:sp>
+        <p:nvSpPr>
+          <p:cNvPr id="35" name="TextBox 34"/>
+          <p:cNvSpPr txBox="1"/>
+          <p:nvPr/>
+        </p:nvSpPr>
+        <p:spPr>
+          <a:xfrm>
+            <a:off x="274320" y="4846320"/>
+            <a:ext cx="8595360" cy="274320"/>
+          </a:xfrm>
+          <a:prstGeom prst="rect">
+            <a:avLst/>
+          </a:prstGeom>
+          <a:noFill/>
+        </p:spPr>
+        <p:txBody>
+          <a:bodyPr wrap="square" lIns="73152" rIns="73152" tIns="36576" bIns="36576" anchor="t">
+            <a:spAutoFit/>
+          </a:bodyPr>
+          <a:lstStyle/>
+          <a:p>
+            <a:pPr algn="l"/>
+            <a:r>
               <a:rPr sz="800" b="0">
                 <a:solidFill>
                   <a:srgbClr val="666A73"/>
                 </a:solidFill>
                 <a:latin typeface="游ゴシック"/>
               </a:rPr>
-              <a:t>※ 本モデルは事業構想上の循環図であり、具体的な数値目標・事業計画については別途開示します。</a:t>
+              <a:t>※ 階段の高さは各フェーズ終了時点の累計獲得機能数を視覚的に表現したものです（厳密な比例ではありません）。</a:t>
             </a:r>
           </a:p>
         </p:txBody>

--- a/統合版_MC2027スタイル_ロードマップ×機能獲得_IR改訂版.pptx
+++ b/統合版_MC2027スタイル_ロードマップ×機能獲得_IR改訂版.pptx
@@ -7795,7 +7795,7 @@
                 </a:solidFill>
                 <a:latin typeface="游ゴシック"/>
               </a:rPr>
-              <a:t>機能獲得の段階的積み上げ（ロードマップ概観）</a:t>
+              <a:t>都市開発事業 ロードマップ概観</a:t>
             </a:r>
           </a:p>
         </p:txBody>
@@ -7865,7 +7865,7 @@
                 </a:solidFill>
                 <a:latin typeface="游ゴシック"/>
               </a:rPr>
-              <a:t>現在 ⇒ 戦略投資フェーズⅠ ⇒ Ⅱ ⇒ 都市開発事業の確立 ― 階段状に機能を獲得</a:t>
+              <a:t>現在 → 戦略投資フェーズⅠ → Ⅱ → 都市開発事業の確立</a:t>
             </a:r>
           </a:p>
         </p:txBody>
@@ -7878,19 +7878,17 @@
         </p:nvSpPr>
         <p:spPr>
           <a:xfrm>
-            <a:off x="6400800" y="868680"/>
-            <a:ext cx="2606040" cy="502920"/>
-          </a:xfrm>
-          <a:prstGeom prst="rect">
-            <a:avLst/>
-          </a:prstGeom>
-          <a:solidFill>
-            <a:srgbClr val="FFFFFF"/>
-          </a:solidFill>
-          <a:ln w="6350">
-            <a:solidFill>
-              <a:srgbClr val="E5E7EB"/>
-            </a:solidFill>
+            <a:off x="7534655" y="1289303"/>
+            <a:ext cx="201168" cy="457200"/>
+          </a:xfrm>
+          <a:prstGeom prst="rect">
+            <a:avLst/>
+          </a:prstGeom>
+          <a:solidFill>
+            <a:srgbClr val="6A689C"/>
+          </a:solidFill>
+          <a:ln>
+            <a:noFill/>
           </a:ln>
           <a:effectLst/>
         </p:spPr>
@@ -7918,60 +7916,24 @@
       </p:sp>
       <p:sp>
         <p:nvSpPr>
-          <p:cNvPr id="8" name="TextBox 7"/>
-          <p:cNvSpPr txBox="1"/>
-          <p:nvPr/>
-        </p:nvSpPr>
-        <p:spPr>
-          <a:xfrm>
-            <a:off x="6492240" y="905256"/>
-            <a:ext cx="2423160" cy="182880"/>
-          </a:xfrm>
-          <a:prstGeom prst="rect">
-            <a:avLst/>
-          </a:prstGeom>
-          <a:noFill/>
-        </p:spPr>
-        <p:txBody>
-          <a:bodyPr wrap="square" lIns="73152" rIns="73152" tIns="36576" bIns="36576" anchor="t">
-            <a:spAutoFit/>
-          </a:bodyPr>
-          <a:lstStyle/>
-          <a:p>
-            <a:pPr algn="l"/>
-            <a:r>
-              <a:rPr sz="800" b="1">
-                <a:solidFill>
-                  <a:srgbClr val="333333"/>
-                </a:solidFill>
-                <a:latin typeface="游ゴシック"/>
-              </a:rPr>
-              <a:t>凡例（機能の三軸）</a:t>
-            </a:r>
-          </a:p>
-        </p:txBody>
-      </p:sp>
-      <p:sp>
-        <p:nvSpPr>
-          <p:cNvPr id="9" name="Rectangle 8"/>
-          <p:cNvSpPr/>
-          <p:nvPr/>
-        </p:nvSpPr>
-        <p:spPr>
-          <a:xfrm>
-            <a:off x="6492240" y="1115568"/>
-            <a:ext cx="777240" cy="201168"/>
-          </a:xfrm>
-          <a:prstGeom prst="rect">
-            <a:avLst/>
-          </a:prstGeom>
-          <a:solidFill>
-            <a:srgbClr val="0B2E5B"/>
+          <p:cNvPr id="8" name="Parallelogram 7"/>
+          <p:cNvSpPr/>
+          <p:nvPr/>
+        </p:nvSpPr>
+        <p:spPr>
+          <a:xfrm>
+            <a:off x="5486399" y="1234439"/>
+            <a:ext cx="2103120" cy="457200"/>
+          </a:xfrm>
+          <a:prstGeom prst="parallelogram">
+            <a:avLst/>
+          </a:prstGeom>
+          <a:solidFill>
+            <a:srgbClr val="A9A7D2"/>
           </a:solidFill>
           <a:ln>
             <a:noFill/>
           </a:ln>
-          <a:effectLst/>
         </p:spPr>
         <p:style>
           <a:lnRef idx="1">
@@ -7992,63 +7954,39 @@
           <a:lstStyle/>
           <a:p>
             <a:pPr algn="ctr"/>
-          </a:p>
-        </p:txBody>
-      </p:sp>
-      <p:sp>
-        <p:nvSpPr>
-          <p:cNvPr id="10" name="TextBox 9"/>
-          <p:cNvSpPr txBox="1"/>
-          <p:nvPr/>
-        </p:nvSpPr>
-        <p:spPr>
-          <a:xfrm>
-            <a:off x="6492240" y="1115568"/>
-            <a:ext cx="777240" cy="201168"/>
-          </a:xfrm>
-          <a:prstGeom prst="rect">
-            <a:avLst/>
-          </a:prstGeom>
-          <a:noFill/>
-        </p:spPr>
-        <p:txBody>
-          <a:bodyPr wrap="square" lIns="73152" rIns="73152" tIns="36576" bIns="36576" anchor="ctr">
-            <a:spAutoFit/>
-          </a:bodyPr>
-          <a:lstStyle/>
-          <a:p>
-            <a:pPr algn="ctr"/>
-            <a:r>
-              <a:rPr sz="800" b="1">
+            <a:r>
+              <a:rPr sz="1200" b="1">
                 <a:solidFill>
                   <a:srgbClr val="FFFFFF"/>
                 </a:solidFill>
                 <a:latin typeface="游ゴシック"/>
               </a:rPr>
-              <a:t>D 開発力</a:t>
-            </a:r>
-          </a:p>
-        </p:txBody>
-      </p:sp>
-      <p:sp>
-        <p:nvSpPr>
-          <p:cNvPr id="11" name="Rectangle 10"/>
-          <p:cNvSpPr/>
-          <p:nvPr/>
-        </p:nvSpPr>
-        <p:spPr>
-          <a:xfrm>
-            <a:off x="7287768" y="1115568"/>
-            <a:ext cx="777240" cy="201168"/>
-          </a:xfrm>
-          <a:prstGeom prst="rect">
-            <a:avLst/>
-          </a:prstGeom>
-          <a:solidFill>
-            <a:srgbClr val="1F4E8F"/>
-          </a:solidFill>
-          <a:ln>
-            <a:noFill/>
+              <a:t>都市開発事業の確立</a:t>
+            </a:r>
+          </a:p>
+        </p:txBody>
+      </p:sp>
+      <p:sp>
+        <p:nvSpPr>
+          <p:cNvPr id="9" name="Rectangle 8"/>
+          <p:cNvSpPr/>
+          <p:nvPr/>
+        </p:nvSpPr>
+        <p:spPr>
+          <a:xfrm>
+            <a:off x="7315199" y="731519"/>
+            <a:ext cx="1691640" cy="365760"/>
+          </a:xfrm>
+          <a:prstGeom prst="rect">
+            <a:avLst/>
+          </a:prstGeom>
+          <a:solidFill>
+            <a:srgbClr val="FFFFFF"/>
+          </a:solidFill>
+          <a:ln w="19050">
+            <a:solidFill>
+              <a:srgbClr val="602E9A"/>
+            </a:solidFill>
           </a:ln>
           <a:effectLst/>
         </p:spPr>
@@ -8076,14 +8014,14 @@
       </p:sp>
       <p:sp>
         <p:nvSpPr>
-          <p:cNvPr id="12" name="TextBox 11"/>
+          <p:cNvPr id="10" name="TextBox 9"/>
           <p:cNvSpPr txBox="1"/>
           <p:nvPr/>
         </p:nvSpPr>
         <p:spPr>
           <a:xfrm>
-            <a:off x="7287768" y="1115568"/>
-            <a:ext cx="777240" cy="201168"/>
+            <a:off x="7315199" y="731519"/>
+            <a:ext cx="1691640" cy="365760"/>
           </a:xfrm>
           <a:prstGeom prst="rect">
             <a:avLst/>
@@ -8098,33 +8036,33 @@
           <a:p>
             <a:pPr algn="ctr"/>
             <a:r>
-              <a:rPr sz="800" b="1">
-                <a:solidFill>
-                  <a:srgbClr val="FFFFFF"/>
+              <a:rPr sz="1300" b="1">
+                <a:solidFill>
+                  <a:srgbClr val="602E9A"/>
                 </a:solidFill>
                 <a:latin typeface="游ゴシック"/>
               </a:rPr>
-              <a:t>A 運用力</a:t>
-            </a:r>
-          </a:p>
-        </p:txBody>
-      </p:sp>
-      <p:sp>
-        <p:nvSpPr>
-          <p:cNvPr id="13" name="Rectangle 12"/>
-          <p:cNvSpPr/>
-          <p:nvPr/>
-        </p:nvSpPr>
-        <p:spPr>
-          <a:xfrm>
-            <a:off x="8083296" y="1115568"/>
-            <a:ext cx="777240" cy="201168"/>
-          </a:xfrm>
-          <a:prstGeom prst="rect">
-            <a:avLst/>
-          </a:prstGeom>
-          <a:solidFill>
-            <a:srgbClr val="007A87"/>
+              <a:t>2025〜2027年</a:t>
+            </a:r>
+          </a:p>
+        </p:txBody>
+      </p:sp>
+      <p:sp>
+        <p:nvSpPr>
+          <p:cNvPr id="11" name="Rectangle 10"/>
+          <p:cNvSpPr/>
+          <p:nvPr/>
+        </p:nvSpPr>
+        <p:spPr>
+          <a:xfrm>
+            <a:off x="5797296" y="1883663"/>
+            <a:ext cx="201168" cy="457200"/>
+          </a:xfrm>
+          <a:prstGeom prst="rect">
+            <a:avLst/>
+          </a:prstGeom>
+          <a:solidFill>
+            <a:srgbClr val="4A7CA8"/>
           </a:solidFill>
           <a:ln>
             <a:noFill/>
@@ -8155,60 +8093,24 @@
       </p:sp>
       <p:sp>
         <p:nvSpPr>
-          <p:cNvPr id="14" name="TextBox 13"/>
-          <p:cNvSpPr txBox="1"/>
-          <p:nvPr/>
-        </p:nvSpPr>
-        <p:spPr>
-          <a:xfrm>
-            <a:off x="8083296" y="1115568"/>
-            <a:ext cx="777240" cy="201168"/>
-          </a:xfrm>
-          <a:prstGeom prst="rect">
-            <a:avLst/>
-          </a:prstGeom>
-          <a:noFill/>
-        </p:spPr>
-        <p:txBody>
-          <a:bodyPr wrap="square" lIns="73152" rIns="73152" tIns="36576" bIns="36576" anchor="ctr">
-            <a:spAutoFit/>
-          </a:bodyPr>
-          <a:lstStyle/>
-          <a:p>
-            <a:pPr algn="ctr"/>
-            <a:r>
-              <a:rPr sz="800" b="1">
-                <a:solidFill>
-                  <a:srgbClr val="FFFFFF"/>
-                </a:solidFill>
-                <a:latin typeface="游ゴシック"/>
-              </a:rPr>
-              <a:t>O 運営力</a:t>
-            </a:r>
-          </a:p>
-        </p:txBody>
-      </p:sp>
-      <p:sp>
-        <p:nvSpPr>
-          <p:cNvPr id="15" name="Rectangle 14"/>
-          <p:cNvSpPr/>
-          <p:nvPr/>
-        </p:nvSpPr>
-        <p:spPr>
-          <a:xfrm>
-            <a:off x="182880" y="3840480"/>
-            <a:ext cx="2057400" cy="822959"/>
-          </a:xfrm>
-          <a:prstGeom prst="rect">
-            <a:avLst/>
-          </a:prstGeom>
-          <a:solidFill>
-            <a:srgbClr val="666A73"/>
+          <p:cNvPr id="12" name="Parallelogram 11"/>
+          <p:cNvSpPr/>
+          <p:nvPr/>
+        </p:nvSpPr>
+        <p:spPr>
+          <a:xfrm>
+            <a:off x="3749039" y="1828799"/>
+            <a:ext cx="2103120" cy="457200"/>
+          </a:xfrm>
+          <a:prstGeom prst="parallelogram">
+            <a:avLst/>
+          </a:prstGeom>
+          <a:solidFill>
+            <a:srgbClr val="A9CCE0"/>
           </a:solidFill>
           <a:ln>
             <a:noFill/>
           </a:ln>
-          <a:effectLst/>
         </p:spPr>
         <p:style>
           <a:lnRef idx="1">
@@ -8229,130 +8131,34 @@
           <a:lstStyle/>
           <a:p>
             <a:pPr algn="ctr"/>
-          </a:p>
-        </p:txBody>
-      </p:sp>
-      <p:sp>
-        <p:nvSpPr>
-          <p:cNvPr id="16" name="TextBox 15"/>
-          <p:cNvSpPr txBox="1"/>
-          <p:nvPr/>
-        </p:nvSpPr>
-        <p:spPr>
-          <a:xfrm>
-            <a:off x="256032" y="3895344"/>
-            <a:ext cx="1911095" cy="256032"/>
-          </a:xfrm>
-          <a:prstGeom prst="rect">
-            <a:avLst/>
-          </a:prstGeom>
-          <a:noFill/>
-        </p:spPr>
-        <p:txBody>
-          <a:bodyPr wrap="square" lIns="73152" rIns="73152" tIns="36576" bIns="36576" anchor="t">
-            <a:spAutoFit/>
-          </a:bodyPr>
-          <a:lstStyle/>
-          <a:p>
-            <a:pPr algn="l"/>
-            <a:r>
-              <a:rPr sz="1100" b="1">
+            <a:r>
+              <a:rPr sz="1200" b="1">
                 <a:solidFill>
                   <a:srgbClr val="FFFFFF"/>
                 </a:solidFill>
                 <a:latin typeface="游ゴシック"/>
               </a:rPr>
-              <a:t>① 現在 (As is)</a:t>
-            </a:r>
-          </a:p>
-        </p:txBody>
-      </p:sp>
-      <p:sp>
-        <p:nvSpPr>
-          <p:cNvPr id="17" name="TextBox 16"/>
-          <p:cNvSpPr txBox="1"/>
-          <p:nvPr/>
-        </p:nvSpPr>
-        <p:spPr>
-          <a:xfrm>
-            <a:off x="1280160" y="3895344"/>
-            <a:ext cx="868680" cy="256032"/>
-          </a:xfrm>
-          <a:prstGeom prst="rect">
-            <a:avLst/>
-          </a:prstGeom>
-          <a:noFill/>
-        </p:spPr>
-        <p:txBody>
-          <a:bodyPr wrap="square" lIns="73152" rIns="73152" tIns="36576" bIns="36576" anchor="t">
-            <a:spAutoFit/>
-          </a:bodyPr>
-          <a:lstStyle/>
-          <a:p>
-            <a:pPr algn="r"/>
-            <a:r>
-              <a:rPr sz="900" b="1">
-                <a:solidFill>
-                  <a:srgbClr val="FFFFFF"/>
-                </a:solidFill>
-                <a:latin typeface="游ゴシック"/>
-              </a:rPr>
-              <a:t>累計 0/10</a:t>
-            </a:r>
-          </a:p>
-        </p:txBody>
-      </p:sp>
-      <p:sp>
-        <p:nvSpPr>
-          <p:cNvPr id="18" name="TextBox 17"/>
-          <p:cNvSpPr txBox="1"/>
-          <p:nvPr/>
-        </p:nvSpPr>
-        <p:spPr>
-          <a:xfrm>
-            <a:off x="256032" y="4389120"/>
-            <a:ext cx="1911095" cy="228600"/>
-          </a:xfrm>
-          <a:prstGeom prst="rect">
-            <a:avLst/>
-          </a:prstGeom>
-          <a:noFill/>
-        </p:spPr>
-        <p:txBody>
-          <a:bodyPr wrap="square" lIns="73152" rIns="73152" tIns="36576" bIns="36576" anchor="ctr">
-            <a:spAutoFit/>
-          </a:bodyPr>
-          <a:lstStyle/>
-          <a:p>
-            <a:pPr algn="l"/>
-            <a:r>
-              <a:rPr sz="900" b="1">
-                <a:solidFill>
-                  <a:srgbClr val="FFFFFF"/>
-                </a:solidFill>
-                <a:latin typeface="游ゴシック"/>
-              </a:rPr>
-              <a:t>出発点：既獲得の機能のみ</a:t>
-            </a:r>
-          </a:p>
-        </p:txBody>
-      </p:sp>
-      <p:sp>
-        <p:nvSpPr>
-          <p:cNvPr id="19" name="Rectangle 18"/>
-          <p:cNvSpPr/>
-          <p:nvPr/>
-        </p:nvSpPr>
-        <p:spPr>
-          <a:xfrm>
-            <a:off x="2295144" y="3017520"/>
-            <a:ext cx="2057400" cy="1645919"/>
-          </a:xfrm>
-          <a:prstGeom prst="rect">
-            <a:avLst/>
-          </a:prstGeom>
-          <a:solidFill>
-            <a:srgbClr val="1F4E8F"/>
+              <a:t>戦略投資フェーズⅡ</a:t>
+            </a:r>
+          </a:p>
+        </p:txBody>
+      </p:sp>
+      <p:sp>
+        <p:nvSpPr>
+          <p:cNvPr id="13" name="Rectangle 12"/>
+          <p:cNvSpPr/>
+          <p:nvPr/>
+        </p:nvSpPr>
+        <p:spPr>
+          <a:xfrm>
+            <a:off x="4059936" y="2478024"/>
+            <a:ext cx="201168" cy="457200"/>
+          </a:xfrm>
+          <a:prstGeom prst="rect">
+            <a:avLst/>
+          </a:prstGeom>
+          <a:solidFill>
+            <a:srgbClr val="2D837A"/>
           </a:solidFill>
           <a:ln>
             <a:noFill/>
@@ -8383,278 +8189,24 @@
       </p:sp>
       <p:sp>
         <p:nvSpPr>
-          <p:cNvPr id="20" name="TextBox 19"/>
-          <p:cNvSpPr txBox="1"/>
-          <p:nvPr/>
-        </p:nvSpPr>
-        <p:spPr>
-          <a:xfrm>
-            <a:off x="2368296" y="3072384"/>
-            <a:ext cx="1911095" cy="256032"/>
-          </a:xfrm>
-          <a:prstGeom prst="rect">
-            <a:avLst/>
-          </a:prstGeom>
-          <a:noFill/>
-        </p:spPr>
-        <p:txBody>
-          <a:bodyPr wrap="square" lIns="73152" rIns="73152" tIns="36576" bIns="36576" anchor="t">
-            <a:spAutoFit/>
-          </a:bodyPr>
-          <a:lstStyle/>
-          <a:p>
-            <a:pPr algn="l"/>
-            <a:r>
-              <a:rPr sz="1100" b="1">
-                <a:solidFill>
-                  <a:srgbClr val="FFFFFF"/>
-                </a:solidFill>
-                <a:latin typeface="游ゴシック"/>
-              </a:rPr>
-              <a:t>② 戦略投資フェーズⅠ</a:t>
-            </a:r>
-          </a:p>
-        </p:txBody>
-      </p:sp>
-      <p:sp>
-        <p:nvSpPr>
-          <p:cNvPr id="21" name="TextBox 20"/>
-          <p:cNvSpPr txBox="1"/>
-          <p:nvPr/>
-        </p:nvSpPr>
-        <p:spPr>
-          <a:xfrm>
-            <a:off x="3392424" y="3072384"/>
-            <a:ext cx="868680" cy="256032"/>
-          </a:xfrm>
-          <a:prstGeom prst="rect">
-            <a:avLst/>
-          </a:prstGeom>
-          <a:noFill/>
-        </p:spPr>
-        <p:txBody>
-          <a:bodyPr wrap="square" lIns="73152" rIns="73152" tIns="36576" bIns="36576" anchor="t">
-            <a:spAutoFit/>
-          </a:bodyPr>
-          <a:lstStyle/>
-          <a:p>
-            <a:pPr algn="r"/>
-            <a:r>
-              <a:rPr sz="900" b="1">
-                <a:solidFill>
-                  <a:srgbClr val="FFFFFF"/>
-                </a:solidFill>
-                <a:latin typeface="游ゴシック"/>
-              </a:rPr>
-              <a:t>累計 5/10</a:t>
-            </a:r>
-          </a:p>
-        </p:txBody>
-      </p:sp>
-      <p:sp>
-        <p:nvSpPr>
-          <p:cNvPr id="22" name="TextBox 21"/>
-          <p:cNvSpPr txBox="1"/>
-          <p:nvPr/>
-        </p:nvSpPr>
-        <p:spPr>
-          <a:xfrm>
-            <a:off x="2368296" y="3401568"/>
-            <a:ext cx="1911095" cy="969263"/>
-          </a:xfrm>
-          <a:prstGeom prst="rect">
-            <a:avLst/>
-          </a:prstGeom>
-          <a:noFill/>
-        </p:spPr>
-        <p:txBody>
-          <a:bodyPr wrap="square">
-            <a:spAutoFit/>
-          </a:bodyPr>
-          <a:lstStyle/>
-          <a:p>
-            <a:pPr>
-              <a:spcBef>
-                <a:spcPts val="200"/>
-              </a:spcBef>
-            </a:pPr>
-            <a:r>
-              <a:rPr sz="800" b="1">
-                <a:solidFill>
-                  <a:srgbClr val="FFFFFF"/>
-                </a:solidFill>
-                <a:latin typeface="游ゴシック"/>
-              </a:rPr>
-              <a:t>[D] </a:t>
-            </a:r>
-            <a:r>
-              <a:rPr sz="900">
-                <a:solidFill>
-                  <a:srgbClr val="FFFFFF"/>
-                </a:solidFill>
-                <a:latin typeface="游ゴシック"/>
-              </a:rPr>
-              <a:t>多様なアセットクラスへの対応力</a:t>
-            </a:r>
-          </a:p>
-          <a:p>
-            <a:pPr>
-              <a:spcBef>
-                <a:spcPts val="200"/>
-              </a:spcBef>
-            </a:pPr>
-            <a:r>
-              <a:rPr sz="800" b="1">
-                <a:solidFill>
-                  <a:srgbClr val="FFFFFF"/>
-                </a:solidFill>
-                <a:latin typeface="游ゴシック"/>
-              </a:rPr>
-              <a:t>[D] </a:t>
-            </a:r>
-            <a:r>
-              <a:rPr sz="900">
-                <a:solidFill>
-                  <a:srgbClr val="FFFFFF"/>
-                </a:solidFill>
-                <a:latin typeface="游ゴシック"/>
-              </a:rPr>
-              <a:t>産業・商業複合型 企画・ソーシング力</a:t>
-            </a:r>
-          </a:p>
-          <a:p>
-            <a:pPr>
-              <a:spcBef>
-                <a:spcPts val="200"/>
-              </a:spcBef>
-            </a:pPr>
-            <a:r>
-              <a:rPr sz="800" b="1">
-                <a:solidFill>
-                  <a:srgbClr val="FFFFFF"/>
-                </a:solidFill>
-                <a:latin typeface="游ゴシック"/>
-              </a:rPr>
-              <a:t>[A] </a:t>
-            </a:r>
-            <a:r>
-              <a:rPr sz="900">
-                <a:solidFill>
-                  <a:srgbClr val="FFFFFF"/>
-                </a:solidFill>
-                <a:latin typeface="游ゴシック"/>
-              </a:rPr>
-              <a:t>投資家基盤の拡充・パイプライン構築</a:t>
-            </a:r>
-          </a:p>
-          <a:p>
-            <a:pPr>
-              <a:spcBef>
-                <a:spcPts val="200"/>
-              </a:spcBef>
-            </a:pPr>
-            <a:r>
-              <a:rPr sz="800" b="1">
-                <a:solidFill>
-                  <a:srgbClr val="FFFFFF"/>
-                </a:solidFill>
-                <a:latin typeface="游ゴシック"/>
-              </a:rPr>
-              <a:t>[A] </a:t>
-            </a:r>
-            <a:r>
-              <a:rPr sz="900">
-                <a:solidFill>
-                  <a:srgbClr val="FFFFFF"/>
-                </a:solidFill>
-                <a:latin typeface="游ゴシック"/>
-              </a:rPr>
-              <a:t>ファンド組成・AM体制構築</a:t>
-            </a:r>
-          </a:p>
-          <a:p>
-            <a:pPr>
-              <a:spcBef>
-                <a:spcPts val="200"/>
-              </a:spcBef>
-            </a:pPr>
-            <a:r>
-              <a:rPr sz="800" b="1">
-                <a:solidFill>
-                  <a:srgbClr val="FFFFFF"/>
-                </a:solidFill>
-                <a:latin typeface="游ゴシック"/>
-              </a:rPr>
-              <a:t>[O] </a:t>
-            </a:r>
-            <a:r>
-              <a:rPr sz="900">
-                <a:solidFill>
-                  <a:srgbClr val="FFFFFF"/>
-                </a:solidFill>
-                <a:latin typeface="游ゴシック"/>
-              </a:rPr>
-              <a:t>NOI拡大・バリューアップ機能</a:t>
-            </a:r>
-          </a:p>
-        </p:txBody>
-      </p:sp>
-      <p:sp>
-        <p:nvSpPr>
-          <p:cNvPr id="23" name="TextBox 22"/>
-          <p:cNvSpPr txBox="1"/>
-          <p:nvPr/>
-        </p:nvSpPr>
-        <p:spPr>
-          <a:xfrm>
-            <a:off x="2368296" y="4389120"/>
-            <a:ext cx="1911095" cy="228600"/>
-          </a:xfrm>
-          <a:prstGeom prst="rect">
-            <a:avLst/>
-          </a:prstGeom>
-          <a:noFill/>
-        </p:spPr>
-        <p:txBody>
-          <a:bodyPr wrap="square" lIns="73152" rIns="73152" tIns="36576" bIns="36576" anchor="ctr">
-            <a:spAutoFit/>
-          </a:bodyPr>
-          <a:lstStyle/>
-          <a:p>
-            <a:pPr algn="l"/>
-            <a:r>
-              <a:rPr sz="900" b="1">
-                <a:solidFill>
-                  <a:srgbClr val="FFFFFF"/>
-                </a:solidFill>
-                <a:latin typeface="游ゴシック"/>
-              </a:rPr>
-              <a:t>+ 5機能（基盤構築）</a:t>
-            </a:r>
-          </a:p>
-        </p:txBody>
-      </p:sp>
-      <p:sp>
-        <p:nvSpPr>
-          <p:cNvPr id="24" name="Rectangle 23"/>
-          <p:cNvSpPr/>
-          <p:nvPr/>
-        </p:nvSpPr>
-        <p:spPr>
-          <a:xfrm>
-            <a:off x="4407408" y="2194560"/>
-            <a:ext cx="2057400" cy="2468879"/>
-          </a:xfrm>
-          <a:prstGeom prst="rect">
-            <a:avLst/>
-          </a:prstGeom>
-          <a:solidFill>
-            <a:srgbClr val="007A87"/>
+          <p:cNvPr id="14" name="Parallelogram 13"/>
+          <p:cNvSpPr/>
+          <p:nvPr/>
+        </p:nvSpPr>
+        <p:spPr>
+          <a:xfrm>
+            <a:off x="2011679" y="2423160"/>
+            <a:ext cx="2103120" cy="457200"/>
+          </a:xfrm>
+          <a:prstGeom prst="parallelogram">
+            <a:avLst/>
+          </a:prstGeom>
+          <a:solidFill>
+            <a:srgbClr val="4FB3A8"/>
           </a:solidFill>
           <a:ln>
             <a:noFill/>
           </a:ln>
-          <a:effectLst/>
         </p:spPr>
         <p:style>
           <a:lnRef idx="1">
@@ -8675,253 +8227,34 @@
           <a:lstStyle/>
           <a:p>
             <a:pPr algn="ctr"/>
-          </a:p>
-        </p:txBody>
-      </p:sp>
-      <p:sp>
-        <p:nvSpPr>
-          <p:cNvPr id="25" name="TextBox 24"/>
-          <p:cNvSpPr txBox="1"/>
-          <p:nvPr/>
-        </p:nvSpPr>
-        <p:spPr>
-          <a:xfrm>
-            <a:off x="4480560" y="2249424"/>
-            <a:ext cx="1911095" cy="256032"/>
-          </a:xfrm>
-          <a:prstGeom prst="rect">
-            <a:avLst/>
-          </a:prstGeom>
-          <a:noFill/>
-        </p:spPr>
-        <p:txBody>
-          <a:bodyPr wrap="square" lIns="73152" rIns="73152" tIns="36576" bIns="36576" anchor="t">
-            <a:spAutoFit/>
-          </a:bodyPr>
-          <a:lstStyle/>
-          <a:p>
-            <a:pPr algn="l"/>
-            <a:r>
-              <a:rPr sz="1100" b="1">
+            <a:r>
+              <a:rPr sz="1200" b="1">
                 <a:solidFill>
                   <a:srgbClr val="FFFFFF"/>
                 </a:solidFill>
                 <a:latin typeface="游ゴシック"/>
               </a:rPr>
-              <a:t>③ 戦略投資フェーズⅡ</a:t>
-            </a:r>
-          </a:p>
-        </p:txBody>
-      </p:sp>
-      <p:sp>
-        <p:nvSpPr>
-          <p:cNvPr id="26" name="TextBox 25"/>
-          <p:cNvSpPr txBox="1"/>
-          <p:nvPr/>
-        </p:nvSpPr>
-        <p:spPr>
-          <a:xfrm>
-            <a:off x="5504688" y="2249424"/>
-            <a:ext cx="868680" cy="256032"/>
-          </a:xfrm>
-          <a:prstGeom prst="rect">
-            <a:avLst/>
-          </a:prstGeom>
-          <a:noFill/>
-        </p:spPr>
-        <p:txBody>
-          <a:bodyPr wrap="square" lIns="73152" rIns="73152" tIns="36576" bIns="36576" anchor="t">
-            <a:spAutoFit/>
-          </a:bodyPr>
-          <a:lstStyle/>
-          <a:p>
-            <a:pPr algn="r"/>
-            <a:r>
-              <a:rPr sz="900" b="1">
-                <a:solidFill>
-                  <a:srgbClr val="FFFFFF"/>
-                </a:solidFill>
-                <a:latin typeface="游ゴシック"/>
-              </a:rPr>
-              <a:t>累計 9/10</a:t>
-            </a:r>
-          </a:p>
-        </p:txBody>
-      </p:sp>
-      <p:sp>
-        <p:nvSpPr>
-          <p:cNvPr id="27" name="TextBox 26"/>
-          <p:cNvSpPr txBox="1"/>
-          <p:nvPr/>
-        </p:nvSpPr>
-        <p:spPr>
-          <a:xfrm>
-            <a:off x="4480560" y="2578608"/>
-            <a:ext cx="1911095" cy="1792223"/>
-          </a:xfrm>
-          <a:prstGeom prst="rect">
-            <a:avLst/>
-          </a:prstGeom>
-          <a:noFill/>
-        </p:spPr>
-        <p:txBody>
-          <a:bodyPr wrap="square">
-            <a:spAutoFit/>
-          </a:bodyPr>
-          <a:lstStyle/>
-          <a:p>
-            <a:pPr>
-              <a:spcBef>
-                <a:spcPts val="200"/>
-              </a:spcBef>
-            </a:pPr>
-            <a:r>
-              <a:rPr sz="800" b="1">
-                <a:solidFill>
-                  <a:srgbClr val="FFFFFF"/>
-                </a:solidFill>
-                <a:latin typeface="游ゴシック"/>
-              </a:rPr>
-              <a:t>[D] </a:t>
-            </a:r>
-            <a:r>
-              <a:rPr sz="900">
-                <a:solidFill>
-                  <a:srgbClr val="FFFFFF"/>
-                </a:solidFill>
-                <a:latin typeface="游ゴシック"/>
-              </a:rPr>
-              <a:t>バリューアップ型開発機能</a:t>
-            </a:r>
-          </a:p>
-          <a:p>
-            <a:pPr>
-              <a:spcBef>
-                <a:spcPts val="200"/>
-              </a:spcBef>
-            </a:pPr>
-            <a:r>
-              <a:rPr sz="800" b="1">
-                <a:solidFill>
-                  <a:srgbClr val="FFFFFF"/>
-                </a:solidFill>
-                <a:latin typeface="游ゴシック"/>
-              </a:rPr>
-              <a:t>[D] </a:t>
-            </a:r>
-            <a:r>
-              <a:rPr sz="900">
-                <a:solidFill>
-                  <a:srgbClr val="FFFFFF"/>
-                </a:solidFill>
-                <a:latin typeface="游ゴシック"/>
-              </a:rPr>
-              <a:t>開発〜Exit の収益サイクル確立</a:t>
-            </a:r>
-          </a:p>
-          <a:p>
-            <a:pPr>
-              <a:spcBef>
-                <a:spcPts val="200"/>
-              </a:spcBef>
-            </a:pPr>
-            <a:r>
-              <a:rPr sz="800" b="1">
-                <a:solidFill>
-                  <a:srgbClr val="FFFFFF"/>
-                </a:solidFill>
-                <a:latin typeface="游ゴシック"/>
-              </a:rPr>
-              <a:t>[A] </a:t>
-            </a:r>
-            <a:r>
-              <a:rPr sz="900">
-                <a:solidFill>
-                  <a:srgbClr val="FFFFFF"/>
-                </a:solidFill>
-                <a:latin typeface="游ゴシック"/>
-              </a:rPr>
-              <a:t>AUM拡大・投資判断力の体系化</a:t>
-            </a:r>
-          </a:p>
-          <a:p>
-            <a:pPr>
-              <a:spcBef>
-                <a:spcPts val="200"/>
-              </a:spcBef>
-            </a:pPr>
-            <a:r>
-              <a:rPr sz="800" b="1">
-                <a:solidFill>
-                  <a:srgbClr val="FFFFFF"/>
-                </a:solidFill>
-                <a:latin typeface="游ゴシック"/>
-              </a:rPr>
-              <a:t>[O] </a:t>
-            </a:r>
-            <a:r>
-              <a:rPr sz="900">
-                <a:solidFill>
-                  <a:srgbClr val="FFFFFF"/>
-                </a:solidFill>
-                <a:latin typeface="游ゴシック"/>
-              </a:rPr>
-              <a:t>関連事業の再編・都市運営PF確立</a:t>
-            </a:r>
-          </a:p>
-        </p:txBody>
-      </p:sp>
-      <p:sp>
-        <p:nvSpPr>
-          <p:cNvPr id="28" name="TextBox 27"/>
-          <p:cNvSpPr txBox="1"/>
-          <p:nvPr/>
-        </p:nvSpPr>
-        <p:spPr>
-          <a:xfrm>
-            <a:off x="4480560" y="4389120"/>
-            <a:ext cx="1911095" cy="228600"/>
-          </a:xfrm>
-          <a:prstGeom prst="rect">
-            <a:avLst/>
-          </a:prstGeom>
-          <a:noFill/>
-        </p:spPr>
-        <p:txBody>
-          <a:bodyPr wrap="square" lIns="73152" rIns="73152" tIns="36576" bIns="36576" anchor="ctr">
-            <a:spAutoFit/>
-          </a:bodyPr>
-          <a:lstStyle/>
-          <a:p>
-            <a:pPr algn="l"/>
-            <a:r>
-              <a:rPr sz="900" b="1">
-                <a:solidFill>
-                  <a:srgbClr val="FFFFFF"/>
-                </a:solidFill>
-                <a:latin typeface="游ゴシック"/>
-              </a:rPr>
-              <a:t>+ 4機能（事業拡大）</a:t>
-            </a:r>
-          </a:p>
-        </p:txBody>
-      </p:sp>
-      <p:sp>
-        <p:nvSpPr>
-          <p:cNvPr id="29" name="Rectangle 28"/>
-          <p:cNvSpPr/>
-          <p:nvPr/>
-        </p:nvSpPr>
-        <p:spPr>
-          <a:xfrm>
-            <a:off x="6519672" y="1371600"/>
-            <a:ext cx="2057400" cy="3291839"/>
-          </a:xfrm>
-          <a:prstGeom prst="rect">
-            <a:avLst/>
-          </a:prstGeom>
-          <a:solidFill>
-            <a:srgbClr val="0B2E5B"/>
+              <a:t>戦略投資フェーズⅠ</a:t>
+            </a:r>
+          </a:p>
+        </p:txBody>
+      </p:sp>
+      <p:sp>
+        <p:nvSpPr>
+          <p:cNvPr id="15" name="Rectangle 14"/>
+          <p:cNvSpPr/>
+          <p:nvPr/>
+        </p:nvSpPr>
+        <p:spPr>
+          <a:xfrm>
+            <a:off x="2322575" y="3072384"/>
+            <a:ext cx="201168" cy="457200"/>
+          </a:xfrm>
+          <a:prstGeom prst="rect">
+            <a:avLst/>
+          </a:prstGeom>
+          <a:solidFill>
+            <a:srgbClr val="4A7CA8"/>
           </a:solidFill>
           <a:ln>
             <a:noFill/>
@@ -8952,14 +8285,332 @@
       </p:sp>
       <p:sp>
         <p:nvSpPr>
-          <p:cNvPr id="30" name="TextBox 29"/>
+          <p:cNvPr id="16" name="Parallelogram 15"/>
+          <p:cNvSpPr/>
+          <p:nvPr/>
+        </p:nvSpPr>
+        <p:spPr>
+          <a:xfrm>
+            <a:off x="274320" y="3017520"/>
+            <a:ext cx="2103120" cy="457200"/>
+          </a:xfrm>
+          <a:prstGeom prst="parallelogram">
+            <a:avLst/>
+          </a:prstGeom>
+          <a:solidFill>
+            <a:srgbClr val="A9CCE0"/>
+          </a:solidFill>
+          <a:ln>
+            <a:noFill/>
+          </a:ln>
+        </p:spPr>
+        <p:style>
+          <a:lnRef idx="1">
+            <a:schemeClr val="accent1"/>
+          </a:lnRef>
+          <a:fillRef idx="3">
+            <a:schemeClr val="accent1"/>
+          </a:fillRef>
+          <a:effectRef idx="2">
+            <a:schemeClr val="accent1"/>
+          </a:effectRef>
+          <a:fontRef idx="minor">
+            <a:schemeClr val="lt1"/>
+          </a:fontRef>
+        </p:style>
+        <p:txBody>
+          <a:bodyPr rtlCol="0" anchor="ctr"/>
+          <a:lstStyle/>
+          <a:p>
+            <a:pPr algn="ctr"/>
+            <a:r>
+              <a:rPr sz="1200" b="1">
+                <a:solidFill>
+                  <a:srgbClr val="FFFFFF"/>
+                </a:solidFill>
+                <a:latin typeface="游ゴシック"/>
+              </a:rPr>
+              <a:t>現在 (As is)</a:t>
+            </a:r>
+          </a:p>
+        </p:txBody>
+      </p:sp>
+      <p:sp>
+        <p:nvSpPr>
+          <p:cNvPr id="17" name="Rectangle 16"/>
+          <p:cNvSpPr/>
+          <p:nvPr/>
+        </p:nvSpPr>
+        <p:spPr>
+          <a:xfrm>
+            <a:off x="274320" y="3840480"/>
+            <a:ext cx="1097280" cy="384048"/>
+          </a:xfrm>
+          <a:prstGeom prst="rect">
+            <a:avLst/>
+          </a:prstGeom>
+          <a:solidFill>
+            <a:srgbClr val="4F81BD"/>
+          </a:solidFill>
+          <a:ln>
+            <a:noFill/>
+          </a:ln>
+          <a:effectLst/>
+        </p:spPr>
+        <p:style>
+          <a:lnRef idx="1">
+            <a:schemeClr val="accent1"/>
+          </a:lnRef>
+          <a:fillRef idx="3">
+            <a:schemeClr val="accent1"/>
+          </a:fillRef>
+          <a:effectRef idx="2">
+            <a:schemeClr val="accent1"/>
+          </a:effectRef>
+          <a:fontRef idx="minor">
+            <a:schemeClr val="lt1"/>
+          </a:fontRef>
+        </p:style>
+        <p:txBody>
+          <a:bodyPr rtlCol="0" anchor="ctr"/>
+          <a:lstStyle/>
+          <a:p>
+            <a:pPr algn="ctr"/>
+          </a:p>
+        </p:txBody>
+      </p:sp>
+      <p:sp>
+        <p:nvSpPr>
+          <p:cNvPr id="18" name="TextBox 17"/>
           <p:cNvSpPr txBox="1"/>
           <p:nvPr/>
         </p:nvSpPr>
         <p:spPr>
           <a:xfrm>
-            <a:off x="6592824" y="1426464"/>
-            <a:ext cx="1911095" cy="256032"/>
+            <a:off x="274320" y="3840480"/>
+            <a:ext cx="1097280" cy="384048"/>
+          </a:xfrm>
+          <a:prstGeom prst="rect">
+            <a:avLst/>
+          </a:prstGeom>
+          <a:noFill/>
+        </p:spPr>
+        <p:txBody>
+          <a:bodyPr wrap="square" lIns="73152" rIns="73152" tIns="36576" bIns="36576" anchor="ctr">
+            <a:spAutoFit/>
+          </a:bodyPr>
+          <a:lstStyle/>
+          <a:p>
+            <a:pPr algn="ctr"/>
+            <a:r>
+              <a:rPr sz="1100" b="1">
+                <a:solidFill>
+                  <a:srgbClr val="FFFFFF"/>
+                </a:solidFill>
+                <a:latin typeface="游ゴシック"/>
+              </a:rPr>
+              <a:t>運用機能</a:t>
+            </a:r>
+          </a:p>
+        </p:txBody>
+      </p:sp>
+      <p:sp>
+        <p:nvSpPr>
+          <p:cNvPr id="19" name="Pentagon 18"/>
+          <p:cNvSpPr/>
+          <p:nvPr/>
+        </p:nvSpPr>
+        <p:spPr>
+          <a:xfrm>
+            <a:off x="1417320" y="3840480"/>
+            <a:ext cx="4251960" cy="384048"/>
+          </a:xfrm>
+          <a:prstGeom prst="homePlate">
+            <a:avLst/>
+          </a:prstGeom>
+          <a:solidFill>
+            <a:srgbClr val="FFFFFF"/>
+          </a:solidFill>
+          <a:ln w="15875">
+            <a:solidFill>
+              <a:srgbClr val="4F81BD"/>
+            </a:solidFill>
+          </a:ln>
+        </p:spPr>
+        <p:style>
+          <a:lnRef idx="1">
+            <a:schemeClr val="accent1"/>
+          </a:lnRef>
+          <a:fillRef idx="3">
+            <a:schemeClr val="accent1"/>
+          </a:fillRef>
+          <a:effectRef idx="2">
+            <a:schemeClr val="accent1"/>
+          </a:effectRef>
+          <a:fontRef idx="minor">
+            <a:schemeClr val="lt1"/>
+          </a:fontRef>
+        </p:style>
+        <p:txBody>
+          <a:bodyPr rtlCol="0" anchor="ctr" lIns="137160" rIns="411480"/>
+          <a:lstStyle/>
+          <a:p>
+            <a:pPr algn="l"/>
+            <a:r>
+              <a:rPr sz="1100" b="1">
+                <a:solidFill>
+                  <a:srgbClr val="333333"/>
+                </a:solidFill>
+                <a:latin typeface="游ゴシック"/>
+              </a:rPr>
+              <a:t>不動産運用事業の機能強化</a:t>
+            </a:r>
+          </a:p>
+        </p:txBody>
+      </p:sp>
+      <p:sp>
+        <p:nvSpPr>
+          <p:cNvPr id="20" name="Rectangle 19"/>
+          <p:cNvSpPr/>
+          <p:nvPr/>
+        </p:nvSpPr>
+        <p:spPr>
+          <a:xfrm>
+            <a:off x="274320" y="4343400"/>
+            <a:ext cx="1097280" cy="384048"/>
+          </a:xfrm>
+          <a:prstGeom prst="rect">
+            <a:avLst/>
+          </a:prstGeom>
+          <a:solidFill>
+            <a:srgbClr val="4F81BD"/>
+          </a:solidFill>
+          <a:ln>
+            <a:noFill/>
+          </a:ln>
+          <a:effectLst/>
+        </p:spPr>
+        <p:style>
+          <a:lnRef idx="1">
+            <a:schemeClr val="accent1"/>
+          </a:lnRef>
+          <a:fillRef idx="3">
+            <a:schemeClr val="accent1"/>
+          </a:fillRef>
+          <a:effectRef idx="2">
+            <a:schemeClr val="accent1"/>
+          </a:effectRef>
+          <a:fontRef idx="minor">
+            <a:schemeClr val="lt1"/>
+          </a:fontRef>
+        </p:style>
+        <p:txBody>
+          <a:bodyPr rtlCol="0" anchor="ctr"/>
+          <a:lstStyle/>
+          <a:p>
+            <a:pPr algn="ctr"/>
+          </a:p>
+        </p:txBody>
+      </p:sp>
+      <p:sp>
+        <p:nvSpPr>
+          <p:cNvPr id="21" name="TextBox 20"/>
+          <p:cNvSpPr txBox="1"/>
+          <p:nvPr/>
+        </p:nvSpPr>
+        <p:spPr>
+          <a:xfrm>
+            <a:off x="274320" y="4343400"/>
+            <a:ext cx="1097280" cy="384048"/>
+          </a:xfrm>
+          <a:prstGeom prst="rect">
+            <a:avLst/>
+          </a:prstGeom>
+          <a:noFill/>
+        </p:spPr>
+        <p:txBody>
+          <a:bodyPr wrap="square" lIns="73152" rIns="73152" tIns="36576" bIns="36576" anchor="ctr">
+            <a:spAutoFit/>
+          </a:bodyPr>
+          <a:lstStyle/>
+          <a:p>
+            <a:pPr algn="ctr"/>
+            <a:r>
+              <a:rPr sz="1100" b="1">
+                <a:solidFill>
+                  <a:srgbClr val="FFFFFF"/>
+                </a:solidFill>
+                <a:latin typeface="游ゴシック"/>
+              </a:rPr>
+              <a:t>開発機能</a:t>
+            </a:r>
+          </a:p>
+        </p:txBody>
+      </p:sp>
+      <p:sp>
+        <p:nvSpPr>
+          <p:cNvPr id="22" name="Pentagon 21"/>
+          <p:cNvSpPr/>
+          <p:nvPr/>
+        </p:nvSpPr>
+        <p:spPr>
+          <a:xfrm>
+            <a:off x="1417320" y="4343400"/>
+            <a:ext cx="7452359" cy="384048"/>
+          </a:xfrm>
+          <a:prstGeom prst="homePlate">
+            <a:avLst/>
+          </a:prstGeom>
+          <a:solidFill>
+            <a:srgbClr val="FFFFFF"/>
+          </a:solidFill>
+          <a:ln w="15875">
+            <a:solidFill>
+              <a:srgbClr val="4F81BD"/>
+            </a:solidFill>
+          </a:ln>
+        </p:spPr>
+        <p:style>
+          <a:lnRef idx="1">
+            <a:schemeClr val="accent1"/>
+          </a:lnRef>
+          <a:fillRef idx="3">
+            <a:schemeClr val="accent1"/>
+          </a:fillRef>
+          <a:effectRef idx="2">
+            <a:schemeClr val="accent1"/>
+          </a:effectRef>
+          <a:fontRef idx="minor">
+            <a:schemeClr val="lt1"/>
+          </a:fontRef>
+        </p:style>
+        <p:txBody>
+          <a:bodyPr rtlCol="0" anchor="ctr" lIns="137160" rIns="411480"/>
+          <a:lstStyle/>
+          <a:p>
+            <a:pPr algn="l"/>
+            <a:r>
+              <a:rPr sz="1100" b="1">
+                <a:solidFill>
+                  <a:srgbClr val="333333"/>
+                </a:solidFill>
+                <a:latin typeface="游ゴシック"/>
+              </a:rPr>
+              <a:t>回転型不動産事業の機能強化</a:t>
+            </a:r>
+          </a:p>
+        </p:txBody>
+      </p:sp>
+      <p:sp>
+        <p:nvSpPr>
+          <p:cNvPr id="23" name="TextBox 22"/>
+          <p:cNvSpPr txBox="1"/>
+          <p:nvPr/>
+        </p:nvSpPr>
+        <p:spPr>
+          <a:xfrm>
+            <a:off x="274320" y="4846320"/>
+            <a:ext cx="8595360" cy="274320"/>
           </a:xfrm>
           <a:prstGeom prst="rect">
             <a:avLst/>
@@ -8974,201 +8625,13 @@
           <a:p>
             <a:pPr algn="l"/>
             <a:r>
-              <a:rPr sz="1100" b="1">
-                <a:solidFill>
-                  <a:srgbClr val="FFFFFF"/>
+              <a:rPr sz="800" b="0">
+                <a:solidFill>
+                  <a:srgbClr val="666A73"/>
                 </a:solidFill>
                 <a:latin typeface="游ゴシック"/>
               </a:rPr>
-              <a:t>④ 都市開発事業の確立</a:t>
-            </a:r>
-          </a:p>
-        </p:txBody>
-      </p:sp>
-      <p:sp>
-        <p:nvSpPr>
-          <p:cNvPr id="31" name="TextBox 30"/>
-          <p:cNvSpPr txBox="1"/>
-          <p:nvPr/>
-        </p:nvSpPr>
-        <p:spPr>
-          <a:xfrm>
-            <a:off x="7616951" y="1426464"/>
-            <a:ext cx="868680" cy="256032"/>
-          </a:xfrm>
-          <a:prstGeom prst="rect">
-            <a:avLst/>
-          </a:prstGeom>
-          <a:noFill/>
-        </p:spPr>
-        <p:txBody>
-          <a:bodyPr wrap="square" lIns="73152" rIns="73152" tIns="36576" bIns="36576" anchor="t">
-            <a:spAutoFit/>
-          </a:bodyPr>
-          <a:lstStyle/>
-          <a:p>
-            <a:pPr algn="r"/>
-            <a:r>
-              <a:rPr sz="900" b="1">
-                <a:solidFill>
-                  <a:srgbClr val="FFFFFF"/>
-                </a:solidFill>
-                <a:latin typeface="游ゴシック"/>
-              </a:rPr>
-              <a:t>累計 10/10</a:t>
-            </a:r>
-          </a:p>
-        </p:txBody>
-      </p:sp>
-      <p:sp>
-        <p:nvSpPr>
-          <p:cNvPr id="32" name="TextBox 31"/>
-          <p:cNvSpPr txBox="1"/>
-          <p:nvPr/>
-        </p:nvSpPr>
-        <p:spPr>
-          <a:xfrm>
-            <a:off x="6592824" y="1755648"/>
-            <a:ext cx="1911095" cy="2615183"/>
-          </a:xfrm>
-          <a:prstGeom prst="rect">
-            <a:avLst/>
-          </a:prstGeom>
-          <a:noFill/>
-        </p:spPr>
-        <p:txBody>
-          <a:bodyPr wrap="square">
-            <a:spAutoFit/>
-          </a:bodyPr>
-          <a:lstStyle/>
-          <a:p>
-            <a:pPr>
-              <a:spcBef>
-                <a:spcPts val="200"/>
-              </a:spcBef>
-            </a:pPr>
-            <a:r>
-              <a:rPr sz="800" b="1">
-                <a:solidFill>
-                  <a:srgbClr val="FFFFFF"/>
-                </a:solidFill>
-                <a:latin typeface="游ゴシック"/>
-              </a:rPr>
-              <a:t>[A] </a:t>
-            </a:r>
-            <a:r>
-              <a:rPr sz="900">
-                <a:solidFill>
-                  <a:srgbClr val="FFFFFF"/>
-                </a:solidFill>
-                <a:latin typeface="游ゴシック"/>
-              </a:rPr>
-              <a:t>高付加価値事業の収益化</a:t>
-            </a:r>
-          </a:p>
-        </p:txBody>
-      </p:sp>
-      <p:sp>
-        <p:nvSpPr>
-          <p:cNvPr id="33" name="TextBox 32"/>
-          <p:cNvSpPr txBox="1"/>
-          <p:nvPr/>
-        </p:nvSpPr>
-        <p:spPr>
-          <a:xfrm>
-            <a:off x="6592824" y="4389120"/>
-            <a:ext cx="1911095" cy="228600"/>
-          </a:xfrm>
-          <a:prstGeom prst="rect">
-            <a:avLst/>
-          </a:prstGeom>
-          <a:noFill/>
-        </p:spPr>
-        <p:txBody>
-          <a:bodyPr wrap="square" lIns="73152" rIns="73152" tIns="36576" bIns="36576" anchor="ctr">
-            <a:spAutoFit/>
-          </a:bodyPr>
-          <a:lstStyle/>
-          <a:p>
-            <a:pPr algn="l"/>
-            <a:r>
-              <a:rPr sz="900" b="1">
-                <a:solidFill>
-                  <a:srgbClr val="FFFFFF"/>
-                </a:solidFill>
-                <a:latin typeface="游ゴシック"/>
-              </a:rPr>
-              <a:t>+ 1機能 — 三軸の好循環が完成</a:t>
-            </a:r>
-          </a:p>
-        </p:txBody>
-      </p:sp>
-      <p:sp>
-        <p:nvSpPr>
-          <p:cNvPr id="34" name="TextBox 33"/>
-          <p:cNvSpPr txBox="1"/>
-          <p:nvPr/>
-        </p:nvSpPr>
-        <p:spPr>
-          <a:xfrm>
-            <a:off x="274320" y="868680"/>
-            <a:ext cx="5943600" cy="274320"/>
-          </a:xfrm>
-          <a:prstGeom prst="rect">
-            <a:avLst/>
-          </a:prstGeom>
-          <a:noFill/>
-        </p:spPr>
-        <p:txBody>
-          <a:bodyPr wrap="square" lIns="73152" rIns="73152" tIns="36576" bIns="36576" anchor="t">
-            <a:spAutoFit/>
-          </a:bodyPr>
-          <a:lstStyle/>
-          <a:p>
-            <a:pPr algn="l"/>
-            <a:r>
-              <a:rPr sz="1000" b="1">
-                <a:solidFill>
-                  <a:srgbClr val="0B2E5B"/>
-                </a:solidFill>
-                <a:latin typeface="游ゴシック"/>
-              </a:rPr>
-              <a:t>■ 各フェーズで機能を上乗せ（cumulative）し、最終フェーズで開発×運用×運営の好循環が完成</a:t>
-            </a:r>
-          </a:p>
-        </p:txBody>
-      </p:sp>
-      <p:sp>
-        <p:nvSpPr>
-          <p:cNvPr id="35" name="TextBox 34"/>
-          <p:cNvSpPr txBox="1"/>
-          <p:nvPr/>
-        </p:nvSpPr>
-        <p:spPr>
-          <a:xfrm>
-            <a:off x="274320" y="4846320"/>
-            <a:ext cx="8595360" cy="274320"/>
-          </a:xfrm>
-          <a:prstGeom prst="rect">
-            <a:avLst/>
-          </a:prstGeom>
-          <a:noFill/>
-        </p:spPr>
-        <p:txBody>
-          <a:bodyPr wrap="square" lIns="73152" rIns="73152" tIns="36576" bIns="36576" anchor="t">
-            <a:spAutoFit/>
-          </a:bodyPr>
-          <a:lstStyle/>
-          <a:p>
-            <a:pPr algn="l"/>
-            <a:r>
-              <a:rPr sz="800" b="0">
-                <a:solidFill>
-                  <a:srgbClr val="666A73"/>
-                </a:solidFill>
-                <a:latin typeface="游ゴシック"/>
-              </a:rPr>
-              <a:t>※ 階段の高さは各フェーズ終了時点の累計獲得機能数を視覚的に表現したものです（厳密な比例ではありません）。</a:t>
+              <a:t>※ 各フェーズで運用・開発の機能を順次強化し、最終的に回転型不動産事業を確立します。本ページの記述には将来見通しに関する情報を含みます。</a:t>
             </a:r>
           </a:p>
         </p:txBody>
